--- a/3испсп/технологии программирования/лекции/1.pptx
+++ b/3испсп/технологии программирования/лекции/1.pptx
@@ -5,15 +5,32 @@
     <p:sldMasterId id="2147483648" r:id="rId1"/>
   </p:sldMasterIdLst>
   <p:sldIdLst>
-    <p:sldId id="256" r:id="rId2"/>
-    <p:sldId id="261" r:id="rId3"/>
-    <p:sldId id="262" r:id="rId4"/>
-    <p:sldId id="257" r:id="rId5"/>
-    <p:sldId id="258" r:id="rId6"/>
-    <p:sldId id="259" r:id="rId7"/>
-    <p:sldId id="260" r:id="rId8"/>
-    <p:sldId id="263" r:id="rId9"/>
-    <p:sldId id="264" r:id="rId10"/>
+    <p:sldId id="281" r:id="rId2"/>
+    <p:sldId id="273" r:id="rId3"/>
+    <p:sldId id="274" r:id="rId4"/>
+    <p:sldId id="275" r:id="rId5"/>
+    <p:sldId id="276" r:id="rId6"/>
+    <p:sldId id="277" r:id="rId7"/>
+    <p:sldId id="278" r:id="rId8"/>
+    <p:sldId id="279" r:id="rId9"/>
+    <p:sldId id="280" r:id="rId10"/>
+    <p:sldId id="256" r:id="rId11"/>
+    <p:sldId id="272" r:id="rId12"/>
+    <p:sldId id="257" r:id="rId13"/>
+    <p:sldId id="258" r:id="rId14"/>
+    <p:sldId id="267" r:id="rId15"/>
+    <p:sldId id="259" r:id="rId16"/>
+    <p:sldId id="260" r:id="rId17"/>
+    <p:sldId id="268" r:id="rId18"/>
+    <p:sldId id="261" r:id="rId19"/>
+    <p:sldId id="263" r:id="rId20"/>
+    <p:sldId id="262" r:id="rId21"/>
+    <p:sldId id="264" r:id="rId22"/>
+    <p:sldId id="269" r:id="rId23"/>
+    <p:sldId id="271" r:id="rId24"/>
+    <p:sldId id="265" r:id="rId25"/>
+    <p:sldId id="270" r:id="rId26"/>
+    <p:sldId id="266" r:id="rId27"/>
   </p:sldIdLst>
   <p:sldSz cx="9144000" cy="6858000" type="screen4x3"/>
   <p:notesSz cx="6858000" cy="9144000"/>
@@ -112,6 +129,22 @@
       </a:defRPr>
     </a:lvl9pPr>
   </p:defaultTextStyle>
+  <p:extLst>
+    <p:ext uri="{EFAFB233-063F-42B5-8137-9DF3F51BA10A}">
+      <p15:sldGuideLst xmlns:p15="http://schemas.microsoft.com/office/powerpoint/2012/main" xmlns="">
+        <p15:guide id="1" orient="horz" pos="2160">
+          <p15:clr>
+            <a:srgbClr val="A4A3A4"/>
+          </p15:clr>
+        </p15:guide>
+        <p15:guide id="2" pos="2880">
+          <p15:clr>
+            <a:srgbClr val="A4A3A4"/>
+          </p15:clr>
+        </p15:guide>
+      </p15:sldGuideLst>
+    </p:ext>
+  </p:extLst>
 </p:presentation>
 </file>
 
@@ -294,10 +327,10 @@
           <a:bodyPr/>
           <a:lstStyle/>
           <a:p>
-            <a:fld id="{787917C5-37CB-42E7-BB65-BAEA85CEF70E}" type="datetimeFigureOut">
+            <a:fld id="{1705624D-BBC2-4E86-AC22-75474281F825}" type="datetimeFigureOut">
               <a:rPr lang="ru-RU" smtClean="0"/>
               <a:pPr/>
-              <a:t>16.02.2026</a:t>
+              <a:t>06.04.2026</a:t>
             </a:fld>
             <a:endParaRPr lang="ru-RU"/>
           </a:p>
@@ -337,7 +370,7 @@
           <a:bodyPr/>
           <a:lstStyle/>
           <a:p>
-            <a:fld id="{9DE4BA9A-FE03-4B2B-AC76-F8CA3926FFCB}" type="slidenum">
+            <a:fld id="{D52B047D-B034-4B57-AD9F-839D370ABAE6}" type="slidenum">
               <a:rPr lang="ru-RU" smtClean="0"/>
               <a:pPr/>
               <a:t>‹#›</a:t>
@@ -461,10 +494,10 @@
           <a:bodyPr/>
           <a:lstStyle/>
           <a:p>
-            <a:fld id="{787917C5-37CB-42E7-BB65-BAEA85CEF70E}" type="datetimeFigureOut">
+            <a:fld id="{1705624D-BBC2-4E86-AC22-75474281F825}" type="datetimeFigureOut">
               <a:rPr lang="ru-RU" smtClean="0"/>
               <a:pPr/>
-              <a:t>16.02.2026</a:t>
+              <a:t>06.04.2026</a:t>
             </a:fld>
             <a:endParaRPr lang="ru-RU"/>
           </a:p>
@@ -504,7 +537,7 @@
           <a:bodyPr/>
           <a:lstStyle/>
           <a:p>
-            <a:fld id="{9DE4BA9A-FE03-4B2B-AC76-F8CA3926FFCB}" type="slidenum">
+            <a:fld id="{D52B047D-B034-4B57-AD9F-839D370ABAE6}" type="slidenum">
               <a:rPr lang="ru-RU" smtClean="0"/>
               <a:pPr/>
               <a:t>‹#›</a:t>
@@ -638,10 +671,10 @@
           <a:bodyPr/>
           <a:lstStyle/>
           <a:p>
-            <a:fld id="{787917C5-37CB-42E7-BB65-BAEA85CEF70E}" type="datetimeFigureOut">
+            <a:fld id="{1705624D-BBC2-4E86-AC22-75474281F825}" type="datetimeFigureOut">
               <a:rPr lang="ru-RU" smtClean="0"/>
               <a:pPr/>
-              <a:t>16.02.2026</a:t>
+              <a:t>06.04.2026</a:t>
             </a:fld>
             <a:endParaRPr lang="ru-RU"/>
           </a:p>
@@ -681,7 +714,7 @@
           <a:bodyPr/>
           <a:lstStyle/>
           <a:p>
-            <a:fld id="{9DE4BA9A-FE03-4B2B-AC76-F8CA3926FFCB}" type="slidenum">
+            <a:fld id="{D52B047D-B034-4B57-AD9F-839D370ABAE6}" type="slidenum">
               <a:rPr lang="ru-RU" smtClean="0"/>
               <a:pPr/>
               <a:t>‹#›</a:t>
@@ -805,10 +838,10 @@
           <a:bodyPr/>
           <a:lstStyle/>
           <a:p>
-            <a:fld id="{787917C5-37CB-42E7-BB65-BAEA85CEF70E}" type="datetimeFigureOut">
+            <a:fld id="{1705624D-BBC2-4E86-AC22-75474281F825}" type="datetimeFigureOut">
               <a:rPr lang="ru-RU" smtClean="0"/>
               <a:pPr/>
-              <a:t>16.02.2026</a:t>
+              <a:t>06.04.2026</a:t>
             </a:fld>
             <a:endParaRPr lang="ru-RU"/>
           </a:p>
@@ -848,7 +881,7 @@
           <a:bodyPr/>
           <a:lstStyle/>
           <a:p>
-            <a:fld id="{9DE4BA9A-FE03-4B2B-AC76-F8CA3926FFCB}" type="slidenum">
+            <a:fld id="{D52B047D-B034-4B57-AD9F-839D370ABAE6}" type="slidenum">
               <a:rPr lang="ru-RU" smtClean="0"/>
               <a:pPr/>
               <a:t>‹#›</a:t>
@@ -1048,10 +1081,10 @@
           <a:bodyPr/>
           <a:lstStyle/>
           <a:p>
-            <a:fld id="{787917C5-37CB-42E7-BB65-BAEA85CEF70E}" type="datetimeFigureOut">
+            <a:fld id="{1705624D-BBC2-4E86-AC22-75474281F825}" type="datetimeFigureOut">
               <a:rPr lang="ru-RU" smtClean="0"/>
               <a:pPr/>
-              <a:t>16.02.2026</a:t>
+              <a:t>06.04.2026</a:t>
             </a:fld>
             <a:endParaRPr lang="ru-RU"/>
           </a:p>
@@ -1091,7 +1124,7 @@
           <a:bodyPr/>
           <a:lstStyle/>
           <a:p>
-            <a:fld id="{9DE4BA9A-FE03-4B2B-AC76-F8CA3926FFCB}" type="slidenum">
+            <a:fld id="{D52B047D-B034-4B57-AD9F-839D370ABAE6}" type="slidenum">
               <a:rPr lang="ru-RU" smtClean="0"/>
               <a:pPr/>
               <a:t>‹#›</a:t>
@@ -1333,10 +1366,10 @@
           <a:bodyPr/>
           <a:lstStyle/>
           <a:p>
-            <a:fld id="{787917C5-37CB-42E7-BB65-BAEA85CEF70E}" type="datetimeFigureOut">
+            <a:fld id="{1705624D-BBC2-4E86-AC22-75474281F825}" type="datetimeFigureOut">
               <a:rPr lang="ru-RU" smtClean="0"/>
               <a:pPr/>
-              <a:t>16.02.2026</a:t>
+              <a:t>06.04.2026</a:t>
             </a:fld>
             <a:endParaRPr lang="ru-RU"/>
           </a:p>
@@ -1376,7 +1409,7 @@
           <a:bodyPr/>
           <a:lstStyle/>
           <a:p>
-            <a:fld id="{9DE4BA9A-FE03-4B2B-AC76-F8CA3926FFCB}" type="slidenum">
+            <a:fld id="{D52B047D-B034-4B57-AD9F-839D370ABAE6}" type="slidenum">
               <a:rPr lang="ru-RU" smtClean="0"/>
               <a:pPr/>
               <a:t>‹#›</a:t>
@@ -1752,10 +1785,10 @@
           <a:bodyPr/>
           <a:lstStyle/>
           <a:p>
-            <a:fld id="{787917C5-37CB-42E7-BB65-BAEA85CEF70E}" type="datetimeFigureOut">
+            <a:fld id="{1705624D-BBC2-4E86-AC22-75474281F825}" type="datetimeFigureOut">
               <a:rPr lang="ru-RU" smtClean="0"/>
               <a:pPr/>
-              <a:t>16.02.2026</a:t>
+              <a:t>06.04.2026</a:t>
             </a:fld>
             <a:endParaRPr lang="ru-RU"/>
           </a:p>
@@ -1795,7 +1828,7 @@
           <a:bodyPr/>
           <a:lstStyle/>
           <a:p>
-            <a:fld id="{9DE4BA9A-FE03-4B2B-AC76-F8CA3926FFCB}" type="slidenum">
+            <a:fld id="{D52B047D-B034-4B57-AD9F-839D370ABAE6}" type="slidenum">
               <a:rPr lang="ru-RU" smtClean="0"/>
               <a:pPr/>
               <a:t>‹#›</a:t>
@@ -1867,10 +1900,10 @@
           <a:bodyPr/>
           <a:lstStyle/>
           <a:p>
-            <a:fld id="{787917C5-37CB-42E7-BB65-BAEA85CEF70E}" type="datetimeFigureOut">
+            <a:fld id="{1705624D-BBC2-4E86-AC22-75474281F825}" type="datetimeFigureOut">
               <a:rPr lang="ru-RU" smtClean="0"/>
               <a:pPr/>
-              <a:t>16.02.2026</a:t>
+              <a:t>06.04.2026</a:t>
             </a:fld>
             <a:endParaRPr lang="ru-RU"/>
           </a:p>
@@ -1910,7 +1943,7 @@
           <a:bodyPr/>
           <a:lstStyle/>
           <a:p>
-            <a:fld id="{9DE4BA9A-FE03-4B2B-AC76-F8CA3926FFCB}" type="slidenum">
+            <a:fld id="{D52B047D-B034-4B57-AD9F-839D370ABAE6}" type="slidenum">
               <a:rPr lang="ru-RU" smtClean="0"/>
               <a:pPr/>
               <a:t>‹#›</a:t>
@@ -1959,10 +1992,10 @@
           <a:bodyPr/>
           <a:lstStyle/>
           <a:p>
-            <a:fld id="{787917C5-37CB-42E7-BB65-BAEA85CEF70E}" type="datetimeFigureOut">
+            <a:fld id="{1705624D-BBC2-4E86-AC22-75474281F825}" type="datetimeFigureOut">
               <a:rPr lang="ru-RU" smtClean="0"/>
               <a:pPr/>
-              <a:t>16.02.2026</a:t>
+              <a:t>06.04.2026</a:t>
             </a:fld>
             <a:endParaRPr lang="ru-RU"/>
           </a:p>
@@ -2002,7 +2035,7 @@
           <a:bodyPr/>
           <a:lstStyle/>
           <a:p>
-            <a:fld id="{9DE4BA9A-FE03-4B2B-AC76-F8CA3926FFCB}" type="slidenum">
+            <a:fld id="{D52B047D-B034-4B57-AD9F-839D370ABAE6}" type="slidenum">
               <a:rPr lang="ru-RU" smtClean="0"/>
               <a:pPr/>
               <a:t>‹#›</a:t>
@@ -2233,10 +2266,10 @@
           <a:bodyPr/>
           <a:lstStyle/>
           <a:p>
-            <a:fld id="{787917C5-37CB-42E7-BB65-BAEA85CEF70E}" type="datetimeFigureOut">
+            <a:fld id="{1705624D-BBC2-4E86-AC22-75474281F825}" type="datetimeFigureOut">
               <a:rPr lang="ru-RU" smtClean="0"/>
               <a:pPr/>
-              <a:t>16.02.2026</a:t>
+              <a:t>06.04.2026</a:t>
             </a:fld>
             <a:endParaRPr lang="ru-RU"/>
           </a:p>
@@ -2276,7 +2309,7 @@
           <a:bodyPr/>
           <a:lstStyle/>
           <a:p>
-            <a:fld id="{9DE4BA9A-FE03-4B2B-AC76-F8CA3926FFCB}" type="slidenum">
+            <a:fld id="{D52B047D-B034-4B57-AD9F-839D370ABAE6}" type="slidenum">
               <a:rPr lang="ru-RU" smtClean="0"/>
               <a:pPr/>
               <a:t>‹#›</a:t>
@@ -2483,10 +2516,10 @@
           <a:bodyPr/>
           <a:lstStyle/>
           <a:p>
-            <a:fld id="{787917C5-37CB-42E7-BB65-BAEA85CEF70E}" type="datetimeFigureOut">
+            <a:fld id="{1705624D-BBC2-4E86-AC22-75474281F825}" type="datetimeFigureOut">
               <a:rPr lang="ru-RU" smtClean="0"/>
               <a:pPr/>
-              <a:t>16.02.2026</a:t>
+              <a:t>06.04.2026</a:t>
             </a:fld>
             <a:endParaRPr lang="ru-RU"/>
           </a:p>
@@ -2526,7 +2559,7 @@
           <a:bodyPr/>
           <a:lstStyle/>
           <a:p>
-            <a:fld id="{9DE4BA9A-FE03-4B2B-AC76-F8CA3926FFCB}" type="slidenum">
+            <a:fld id="{D52B047D-B034-4B57-AD9F-839D370ABAE6}" type="slidenum">
               <a:rPr lang="ru-RU" smtClean="0"/>
               <a:pPr/>
               <a:t>‹#›</a:t>
@@ -2693,10 +2726,10 @@
             </a:lvl1pPr>
           </a:lstStyle>
           <a:p>
-            <a:fld id="{787917C5-37CB-42E7-BB65-BAEA85CEF70E}" type="datetimeFigureOut">
+            <a:fld id="{1705624D-BBC2-4E86-AC22-75474281F825}" type="datetimeFigureOut">
               <a:rPr lang="ru-RU" smtClean="0"/>
               <a:pPr/>
-              <a:t>16.02.2026</a:t>
+              <a:t>06.04.2026</a:t>
             </a:fld>
             <a:endParaRPr lang="ru-RU"/>
           </a:p>
@@ -2772,7 +2805,7 @@
             </a:lvl1pPr>
           </a:lstStyle>
           <a:p>
-            <a:fld id="{9DE4BA9A-FE03-4B2B-AC76-F8CA3926FFCB}" type="slidenum">
+            <a:fld id="{D52B047D-B034-4B57-AD9F-839D370ABAE6}" type="slidenum">
               <a:rPr lang="ru-RU" smtClean="0"/>
               <a:pPr/>
               <a:t>‹#›</a:t>
@@ -3091,6 +3124,2473 @@
         </p:txBody>
       </p:sp>
     </p:spTree>
+  </p:cSld>
+  <p:clrMapOvr>
+    <a:masterClrMapping/>
+  </p:clrMapOvr>
+</p:sld>
+</file>
+
+<file path=ppt/slides/slide10.xml><?xml version="1.0" encoding="utf-8"?>
+<p:sld xmlns:a="http://schemas.openxmlformats.org/drawingml/2006/main" xmlns:r="http://schemas.openxmlformats.org/officeDocument/2006/relationships" xmlns:p="http://schemas.openxmlformats.org/presentationml/2006/main">
+  <p:cSld>
+    <p:spTree>
+      <p:nvGrpSpPr>
+        <p:cNvPr id="1" name=""/>
+        <p:cNvGrpSpPr/>
+        <p:nvPr/>
+      </p:nvGrpSpPr>
+      <p:grpSpPr>
+        <a:xfrm>
+          <a:off x="0" y="0"/>
+          <a:ext cx="0" cy="0"/>
+          <a:chOff x="0" y="0"/>
+          <a:chExt cx="0" cy="0"/>
+        </a:xfrm>
+      </p:grpSpPr>
+      <p:sp>
+        <p:nvSpPr>
+          <p:cNvPr id="2" name="Заголовок 1"/>
+          <p:cNvSpPr>
+            <a:spLocks noGrp="1"/>
+          </p:cNvSpPr>
+          <p:nvPr>
+            <p:ph type="ctrTitle"/>
+          </p:nvPr>
+        </p:nvSpPr>
+        <p:spPr/>
+        <p:txBody>
+          <a:bodyPr/>
+          <a:lstStyle/>
+          <a:p>
+            <a:r>
+              <a:rPr lang="ru-RU" dirty="0" smtClean="0"/>
+              <a:t>Базовые операторы и типы</a:t>
+            </a:r>
+            <a:endParaRPr lang="ru-RU" dirty="0"/>
+          </a:p>
+        </p:txBody>
+      </p:sp>
+    </p:spTree>
+  </p:cSld>
+  <p:clrMapOvr>
+    <a:masterClrMapping/>
+  </p:clrMapOvr>
+</p:sld>
+</file>
+
+<file path=ppt/slides/slide11.xml><?xml version="1.0" encoding="utf-8"?>
+<p:sld xmlns:a="http://schemas.openxmlformats.org/drawingml/2006/main" xmlns:r="http://schemas.openxmlformats.org/officeDocument/2006/relationships" xmlns:p="http://schemas.openxmlformats.org/presentationml/2006/main">
+  <p:cSld>
+    <p:spTree>
+      <p:nvGrpSpPr>
+        <p:cNvPr id="1" name=""/>
+        <p:cNvGrpSpPr/>
+        <p:nvPr/>
+      </p:nvGrpSpPr>
+      <p:grpSpPr>
+        <a:xfrm>
+          <a:off x="0" y="0"/>
+          <a:ext cx="0" cy="0"/>
+          <a:chOff x="0" y="0"/>
+          <a:chExt cx="0" cy="0"/>
+        </a:xfrm>
+      </p:grpSpPr>
+      <p:sp>
+        <p:nvSpPr>
+          <p:cNvPr id="2" name="Заголовок 1"/>
+          <p:cNvSpPr>
+            <a:spLocks noGrp="1"/>
+          </p:cNvSpPr>
+          <p:nvPr>
+            <p:ph type="title"/>
+          </p:nvPr>
+        </p:nvSpPr>
+        <p:spPr/>
+        <p:txBody>
+          <a:bodyPr/>
+          <a:lstStyle/>
+          <a:p>
+            <a:r>
+              <a:rPr lang="ru-RU" dirty="0" smtClean="0"/>
+              <a:t>Теоретический материал</a:t>
+            </a:r>
+            <a:endParaRPr lang="ru-RU" dirty="0"/>
+          </a:p>
+        </p:txBody>
+      </p:sp>
+      <p:sp>
+        <p:nvSpPr>
+          <p:cNvPr id="3" name="Прямоугольник 2"/>
+          <p:cNvSpPr/>
+          <p:nvPr/>
+        </p:nvSpPr>
+        <p:spPr>
+          <a:xfrm>
+            <a:off x="1" y="1428736"/>
+            <a:ext cx="9144000" cy="1384995"/>
+          </a:xfrm>
+          <a:prstGeom prst="rect">
+            <a:avLst/>
+          </a:prstGeom>
+        </p:spPr>
+        <p:txBody>
+          <a:bodyPr wrap="square">
+            <a:spAutoFit/>
+          </a:bodyPr>
+          <a:lstStyle/>
+          <a:p>
+            <a:pPr algn="just"/>
+            <a:r>
+              <a:rPr lang="ru-RU" sz="2800" b="1" dirty="0" smtClean="0">
+                <a:latin typeface="Times New Roman" pitchFamily="18" charset="0"/>
+                <a:cs typeface="Times New Roman" pitchFamily="18" charset="0"/>
+              </a:rPr>
+              <a:t>Шпаргалка: </a:t>
+            </a:r>
+            <a:endParaRPr lang="en-US" sz="2800" b="1" dirty="0" smtClean="0">
+              <a:latin typeface="Times New Roman" pitchFamily="18" charset="0"/>
+              <a:cs typeface="Times New Roman" pitchFamily="18" charset="0"/>
+            </a:endParaRPr>
+          </a:p>
+          <a:p>
+            <a:pPr algn="just"/>
+            <a:r>
+              <a:rPr lang="en-US" sz="2800" b="1" dirty="0" smtClean="0">
+                <a:latin typeface="Times New Roman" pitchFamily="18" charset="0"/>
+                <a:cs typeface="Times New Roman" pitchFamily="18" charset="0"/>
+                <a:hlinkClick r:id="rId2"/>
+              </a:rPr>
+              <a:t>https://disk.360.yandex.ru/i/g-O-LX-QsYG8Lw</a:t>
+            </a:r>
+            <a:endParaRPr lang="en-US" sz="2800" b="1" dirty="0" smtClean="0">
+              <a:latin typeface="Times New Roman" pitchFamily="18" charset="0"/>
+              <a:cs typeface="Times New Roman" pitchFamily="18" charset="0"/>
+            </a:endParaRPr>
+          </a:p>
+          <a:p>
+            <a:pPr algn="just"/>
+            <a:endParaRPr lang="ru-RU" sz="2800" b="1" dirty="0">
+              <a:latin typeface="Times New Roman" pitchFamily="18" charset="0"/>
+              <a:cs typeface="Times New Roman" pitchFamily="18" charset="0"/>
+            </a:endParaRPr>
+          </a:p>
+        </p:txBody>
+      </p:sp>
+    </p:spTree>
+  </p:cSld>
+  <p:clrMapOvr>
+    <a:masterClrMapping/>
+  </p:clrMapOvr>
+</p:sld>
+</file>
+
+<file path=ppt/slides/slide12.xml><?xml version="1.0" encoding="utf-8"?>
+<p:sld xmlns:a="http://schemas.openxmlformats.org/drawingml/2006/main" xmlns:r="http://schemas.openxmlformats.org/officeDocument/2006/relationships" xmlns:p="http://schemas.openxmlformats.org/presentationml/2006/main">
+  <p:cSld>
+    <p:spTree>
+      <p:nvGrpSpPr>
+        <p:cNvPr id="1" name=""/>
+        <p:cNvGrpSpPr/>
+        <p:nvPr/>
+      </p:nvGrpSpPr>
+      <p:grpSpPr>
+        <a:xfrm>
+          <a:off x="0" y="0"/>
+          <a:ext cx="0" cy="0"/>
+          <a:chOff x="0" y="0"/>
+          <a:chExt cx="0" cy="0"/>
+        </a:xfrm>
+      </p:grpSpPr>
+      <p:sp>
+        <p:nvSpPr>
+          <p:cNvPr id="2" name="Прямоугольник 1"/>
+          <p:cNvSpPr/>
+          <p:nvPr/>
+        </p:nvSpPr>
+        <p:spPr>
+          <a:xfrm>
+            <a:off x="0" y="142852"/>
+            <a:ext cx="9144000" cy="1477328"/>
+          </a:xfrm>
+          <a:prstGeom prst="rect">
+            <a:avLst/>
+          </a:prstGeom>
+        </p:spPr>
+        <p:txBody>
+          <a:bodyPr wrap="square">
+            <a:spAutoFit/>
+          </a:bodyPr>
+          <a:lstStyle/>
+          <a:p>
+            <a:pPr algn="just"/>
+            <a:r>
+              <a:rPr lang="ru-RU" dirty="0" smtClean="0">
+                <a:latin typeface="Times New Roman" pitchFamily="18" charset="0"/>
+                <a:cs typeface="Times New Roman" pitchFamily="18" charset="0"/>
+              </a:rPr>
+              <a:t>В памяти компьютера все данные - будь то звук, изображение или текст - получаются, хранятся и обрабатываются в виде набора </a:t>
+            </a:r>
+            <a:r>
+              <a:rPr lang="ru-RU" b="1" dirty="0">
+                <a:latin typeface="Times New Roman" pitchFamily="18" charset="0"/>
+                <a:cs typeface="Times New Roman" pitchFamily="18" charset="0"/>
+              </a:rPr>
+              <a:t>байт.</a:t>
+            </a:r>
+            <a:r>
+              <a:rPr lang="ru-RU" dirty="0" smtClean="0">
+                <a:latin typeface="Times New Roman" pitchFamily="18" charset="0"/>
+                <a:cs typeface="Times New Roman" pitchFamily="18" charset="0"/>
+              </a:rPr>
+              <a:t> Но ведь нам нужны звуки, картинки и так далее. Как быть?</a:t>
+            </a:r>
+          </a:p>
+          <a:p>
+            <a:pPr algn="just"/>
+            <a:r>
+              <a:rPr lang="ru-RU" dirty="0" smtClean="0">
+                <a:latin typeface="Times New Roman" pitchFamily="18" charset="0"/>
+                <a:cs typeface="Times New Roman" pitchFamily="18" charset="0"/>
+              </a:rPr>
+              <a:t>В таком случае вводится понятие </a:t>
+            </a:r>
+            <a:r>
+              <a:rPr lang="ru-RU" b="1" dirty="0">
+                <a:latin typeface="Times New Roman" pitchFamily="18" charset="0"/>
+                <a:cs typeface="Times New Roman" pitchFamily="18" charset="0"/>
+              </a:rPr>
+              <a:t>тип данных</a:t>
+            </a:r>
+            <a:r>
+              <a:rPr lang="ru-RU" dirty="0" smtClean="0">
+                <a:latin typeface="Times New Roman" pitchFamily="18" charset="0"/>
+                <a:cs typeface="Times New Roman" pitchFamily="18" charset="0"/>
+              </a:rPr>
+              <a:t> - то, что представляет собой последовательность байт, как её следует воспринимать.</a:t>
+            </a:r>
+            <a:endParaRPr lang="ru-RU" dirty="0">
+              <a:latin typeface="Times New Roman" pitchFamily="18" charset="0"/>
+              <a:cs typeface="Times New Roman" pitchFamily="18" charset="0"/>
+            </a:endParaRPr>
+          </a:p>
+        </p:txBody>
+      </p:sp>
+      <p:pic>
+        <p:nvPicPr>
+          <p:cNvPr id="1026" name="Picture 2" descr="https://ucarecdn.stepik.net/76ee26d4-d486-40d9-94cb-feda4c21bc15/"/>
+          <p:cNvPicPr>
+            <a:picLocks noChangeAspect="1" noChangeArrowheads="1"/>
+          </p:cNvPicPr>
+          <p:nvPr/>
+        </p:nvPicPr>
+        <p:blipFill>
+          <a:blip r:embed="rId2"/>
+          <a:srcRect/>
+          <a:stretch>
+            <a:fillRect/>
+          </a:stretch>
+        </p:blipFill>
+        <p:spPr bwMode="auto">
+          <a:xfrm>
+            <a:off x="571472" y="1631028"/>
+            <a:ext cx="7398404" cy="5226972"/>
+          </a:xfrm>
+          <a:prstGeom prst="rect">
+            <a:avLst/>
+          </a:prstGeom>
+          <a:noFill/>
+        </p:spPr>
+      </p:pic>
+    </p:spTree>
+  </p:cSld>
+  <p:clrMapOvr>
+    <a:masterClrMapping/>
+  </p:clrMapOvr>
+</p:sld>
+</file>
+
+<file path=ppt/slides/slide13.xml><?xml version="1.0" encoding="utf-8"?>
+<p:sld xmlns:a="http://schemas.openxmlformats.org/drawingml/2006/main" xmlns:r="http://schemas.openxmlformats.org/officeDocument/2006/relationships" xmlns:p="http://schemas.openxmlformats.org/presentationml/2006/main">
+  <p:cSld>
+    <p:spTree>
+      <p:nvGrpSpPr>
+        <p:cNvPr id="1" name=""/>
+        <p:cNvGrpSpPr/>
+        <p:nvPr/>
+      </p:nvGrpSpPr>
+      <p:grpSpPr>
+        <a:xfrm>
+          <a:off x="0" y="0"/>
+          <a:ext cx="0" cy="0"/>
+          <a:chOff x="0" y="0"/>
+          <a:chExt cx="0" cy="0"/>
+        </a:xfrm>
+      </p:grpSpPr>
+      <p:sp>
+        <p:nvSpPr>
+          <p:cNvPr id="4" name="Прямоугольник 3"/>
+          <p:cNvSpPr/>
+          <p:nvPr/>
+        </p:nvSpPr>
+        <p:spPr>
+          <a:xfrm>
+            <a:off x="0" y="117693"/>
+            <a:ext cx="9144000" cy="6740307"/>
+          </a:xfrm>
+          <a:prstGeom prst="rect">
+            <a:avLst/>
+          </a:prstGeom>
+        </p:spPr>
+        <p:txBody>
+          <a:bodyPr wrap="square">
+            <a:spAutoFit/>
+          </a:bodyPr>
+          <a:lstStyle/>
+          <a:p>
+            <a:pPr algn="just"/>
+            <a:r>
+              <a:rPr lang="ru-RU" dirty="0" smtClean="0">
+                <a:latin typeface="Times New Roman" pitchFamily="18" charset="0"/>
+                <a:cs typeface="Times New Roman" pitchFamily="18" charset="0"/>
+              </a:rPr>
+              <a:t>Переменная - это область памяти, которая хранит определённый тип данных. Обращение к хранимым данным происходит по имени переменной.</a:t>
+            </a:r>
+          </a:p>
+          <a:p>
+            <a:pPr algn="just"/>
+            <a:r>
+              <a:rPr lang="ru-RU" dirty="0" smtClean="0">
+                <a:latin typeface="Times New Roman" pitchFamily="18" charset="0"/>
+                <a:cs typeface="Times New Roman" pitchFamily="18" charset="0"/>
+              </a:rPr>
+              <a:t>Чтобы использовать переменную, её сначала надо объявить (создать), а затем инициализировать (задать значение).</a:t>
+            </a:r>
+          </a:p>
+          <a:p>
+            <a:pPr algn="just"/>
+            <a:r>
+              <a:rPr lang="ru-RU" dirty="0" smtClean="0">
+                <a:latin typeface="Times New Roman" pitchFamily="18" charset="0"/>
+                <a:cs typeface="Times New Roman" pitchFamily="18" charset="0"/>
+              </a:rPr>
+              <a:t>Создание переменной</a:t>
+            </a:r>
+          </a:p>
+          <a:p>
+            <a:pPr algn="just"/>
+            <a:r>
+              <a:rPr lang="ru-RU" dirty="0" smtClean="0">
+                <a:latin typeface="Times New Roman" pitchFamily="18" charset="0"/>
+                <a:cs typeface="Times New Roman" pitchFamily="18" charset="0"/>
+              </a:rPr>
+              <a:t>Переменные создаются следующим образом: сначала указывается её тип, затем имя, после чего ей присваивается значение.</a:t>
+            </a:r>
+          </a:p>
+          <a:p>
+            <a:pPr algn="just"/>
+            <a:r>
+              <a:rPr lang="ru-RU" dirty="0" smtClean="0">
+                <a:latin typeface="Times New Roman" pitchFamily="18" charset="0"/>
+                <a:cs typeface="Times New Roman" pitchFamily="18" charset="0"/>
+              </a:rPr>
+              <a:t>Рассмотрим на примере:</a:t>
+            </a:r>
+          </a:p>
+          <a:p>
+            <a:pPr algn="just"/>
+            <a:r>
+              <a:rPr lang="ru-RU" dirty="0" err="1" smtClean="0">
+                <a:latin typeface="Courier New" pitchFamily="49" charset="0"/>
+                <a:cs typeface="Courier New" pitchFamily="49" charset="0"/>
+              </a:rPr>
+              <a:t>int</a:t>
+            </a:r>
+            <a:r>
+              <a:rPr lang="ru-RU" dirty="0" smtClean="0">
+                <a:latin typeface="Courier New" pitchFamily="49" charset="0"/>
+                <a:cs typeface="Courier New" pitchFamily="49" charset="0"/>
+              </a:rPr>
+              <a:t> </a:t>
+            </a:r>
+            <a:r>
+              <a:rPr lang="ru-RU" dirty="0" err="1" smtClean="0">
+                <a:latin typeface="Courier New" pitchFamily="49" charset="0"/>
+                <a:cs typeface="Courier New" pitchFamily="49" charset="0"/>
+              </a:rPr>
+              <a:t>a</a:t>
+            </a:r>
+            <a:r>
+              <a:rPr lang="ru-RU" dirty="0" smtClean="0">
+                <a:latin typeface="Courier New" pitchFamily="49" charset="0"/>
+                <a:cs typeface="Courier New" pitchFamily="49" charset="0"/>
+              </a:rPr>
+              <a:t> = 5;</a:t>
+            </a:r>
+          </a:p>
+          <a:p>
+            <a:pPr algn="just"/>
+            <a:r>
+              <a:rPr lang="ru-RU" dirty="0" smtClean="0">
+                <a:latin typeface="Times New Roman" pitchFamily="18" charset="0"/>
+                <a:cs typeface="Times New Roman" pitchFamily="18" charset="0"/>
+              </a:rPr>
+              <a:t>Здесь </a:t>
+            </a:r>
+            <a:r>
+              <a:rPr lang="ru-RU" dirty="0" err="1" smtClean="0">
+                <a:latin typeface="Times New Roman" pitchFamily="18" charset="0"/>
+                <a:cs typeface="Times New Roman" pitchFamily="18" charset="0"/>
+              </a:rPr>
+              <a:t>int</a:t>
+            </a:r>
+            <a:r>
+              <a:rPr lang="ru-RU" dirty="0" smtClean="0">
+                <a:latin typeface="Times New Roman" pitchFamily="18" charset="0"/>
+                <a:cs typeface="Times New Roman" pitchFamily="18" charset="0"/>
+              </a:rPr>
+              <a:t> - тип данных, </a:t>
+            </a:r>
+            <a:r>
+              <a:rPr lang="ru-RU" dirty="0" err="1" smtClean="0">
+                <a:latin typeface="Times New Roman" pitchFamily="18" charset="0"/>
+                <a:cs typeface="Times New Roman" pitchFamily="18" charset="0"/>
+              </a:rPr>
+              <a:t>a</a:t>
+            </a:r>
+            <a:r>
+              <a:rPr lang="ru-RU" dirty="0" smtClean="0">
+                <a:latin typeface="Times New Roman" pitchFamily="18" charset="0"/>
+                <a:cs typeface="Times New Roman" pitchFamily="18" charset="0"/>
+              </a:rPr>
+              <a:t> - название (имя) переменной, а значение после знака равно - ей значение.</a:t>
+            </a:r>
+          </a:p>
+          <a:p>
+            <a:pPr algn="just"/>
+            <a:r>
+              <a:rPr lang="ru-RU" dirty="0" smtClean="0">
+                <a:latin typeface="Times New Roman" pitchFamily="18" charset="0"/>
+                <a:cs typeface="Times New Roman" pitchFamily="18" charset="0"/>
+              </a:rPr>
+              <a:t>Важно: в имени переменной можно использовать только строчные и прописные буквы и знак подчёркивания. Также допустимы цифры, но имя не может с них начинаться</a:t>
+            </a:r>
+          </a:p>
+          <a:p>
+            <a:pPr algn="just"/>
+            <a:r>
+              <a:rPr lang="ru-RU" dirty="0" smtClean="0">
+                <a:latin typeface="Times New Roman" pitchFamily="18" charset="0"/>
+                <a:cs typeface="Times New Roman" pitchFamily="18" charset="0"/>
+              </a:rPr>
+              <a:t>Задать значения для чисел не сложно. Но как быть с другими типами, например, с дробными числами?</a:t>
+            </a:r>
+          </a:p>
+          <a:p>
+            <a:pPr algn="just"/>
+            <a:r>
+              <a:rPr lang="ru-RU" dirty="0" smtClean="0">
+                <a:latin typeface="Times New Roman" pitchFamily="18" charset="0"/>
+                <a:cs typeface="Times New Roman" pitchFamily="18" charset="0"/>
+              </a:rPr>
+              <a:t>Для дробей в качестве разделителя используется точка:</a:t>
+            </a:r>
+          </a:p>
+          <a:p>
+            <a:pPr algn="just"/>
+            <a:r>
+              <a:rPr lang="ru-RU" dirty="0" err="1">
+                <a:latin typeface="Courier New" pitchFamily="49" charset="0"/>
+                <a:cs typeface="Courier New" pitchFamily="49" charset="0"/>
+              </a:rPr>
+              <a:t>double</a:t>
+            </a:r>
+            <a:r>
+              <a:rPr lang="ru-RU" dirty="0">
+                <a:latin typeface="Courier New" pitchFamily="49" charset="0"/>
+                <a:cs typeface="Courier New" pitchFamily="49" charset="0"/>
+              </a:rPr>
+              <a:t> </a:t>
+            </a:r>
+            <a:r>
+              <a:rPr lang="ru-RU" dirty="0" err="1">
+                <a:latin typeface="Courier New" pitchFamily="49" charset="0"/>
+                <a:cs typeface="Courier New" pitchFamily="49" charset="0"/>
+              </a:rPr>
+              <a:t>pi</a:t>
+            </a:r>
+            <a:r>
+              <a:rPr lang="ru-RU" dirty="0">
+                <a:latin typeface="Courier New" pitchFamily="49" charset="0"/>
+                <a:cs typeface="Courier New" pitchFamily="49" charset="0"/>
+              </a:rPr>
+              <a:t> = 3.14;</a:t>
+            </a:r>
+          </a:p>
+          <a:p>
+            <a:pPr algn="just"/>
+            <a:r>
+              <a:rPr lang="ru-RU" dirty="0" smtClean="0">
+                <a:latin typeface="Times New Roman" pitchFamily="18" charset="0"/>
+                <a:cs typeface="Times New Roman" pitchFamily="18" charset="0"/>
+              </a:rPr>
+              <a:t>Значения строки и символа находятся между двойными и одинарными кавычками соответственно.</a:t>
+            </a:r>
+          </a:p>
+          <a:p>
+            <a:pPr algn="just"/>
+            <a:r>
+              <a:rPr lang="ru-RU" dirty="0" err="1">
+                <a:latin typeface="Courier New" pitchFamily="49" charset="0"/>
+                <a:cs typeface="Courier New" pitchFamily="49" charset="0"/>
+              </a:rPr>
+              <a:t>string</a:t>
+            </a:r>
+            <a:r>
+              <a:rPr lang="ru-RU" dirty="0">
+                <a:latin typeface="Courier New" pitchFamily="49" charset="0"/>
+                <a:cs typeface="Courier New" pitchFamily="49" charset="0"/>
+              </a:rPr>
+              <a:t> </a:t>
+            </a:r>
+            <a:r>
+              <a:rPr lang="ru-RU" dirty="0" err="1">
+                <a:latin typeface="Courier New" pitchFamily="49" charset="0"/>
+                <a:cs typeface="Courier New" pitchFamily="49" charset="0"/>
+              </a:rPr>
+              <a:t>str</a:t>
+            </a:r>
+            <a:r>
+              <a:rPr lang="ru-RU" dirty="0">
+                <a:latin typeface="Courier New" pitchFamily="49" charset="0"/>
+                <a:cs typeface="Courier New" pitchFamily="49" charset="0"/>
+              </a:rPr>
+              <a:t> = "</a:t>
+            </a:r>
+            <a:r>
+              <a:rPr lang="ru-RU" dirty="0" err="1">
+                <a:latin typeface="Courier New" pitchFamily="49" charset="0"/>
+                <a:cs typeface="Courier New" pitchFamily="49" charset="0"/>
+              </a:rPr>
+              <a:t>name</a:t>
+            </a:r>
+            <a:r>
+              <a:rPr lang="ru-RU" dirty="0">
+                <a:latin typeface="Courier New" pitchFamily="49" charset="0"/>
+                <a:cs typeface="Courier New" pitchFamily="49" charset="0"/>
+              </a:rPr>
+              <a:t>";</a:t>
+            </a:r>
+          </a:p>
+          <a:p>
+            <a:pPr algn="just"/>
+            <a:r>
+              <a:rPr lang="ru-RU" dirty="0" err="1">
+                <a:latin typeface="Courier New" pitchFamily="49" charset="0"/>
+                <a:cs typeface="Courier New" pitchFamily="49" charset="0"/>
+              </a:rPr>
+              <a:t>char</a:t>
+            </a:r>
+            <a:r>
+              <a:rPr lang="ru-RU" dirty="0">
+                <a:latin typeface="Courier New" pitchFamily="49" charset="0"/>
+                <a:cs typeface="Courier New" pitchFamily="49" charset="0"/>
+              </a:rPr>
+              <a:t> </a:t>
+            </a:r>
+            <a:r>
+              <a:rPr lang="ru-RU" dirty="0" err="1">
+                <a:latin typeface="Courier New" pitchFamily="49" charset="0"/>
+                <a:cs typeface="Courier New" pitchFamily="49" charset="0"/>
+              </a:rPr>
+              <a:t>ch</a:t>
+            </a:r>
+            <a:r>
+              <a:rPr lang="ru-RU" dirty="0">
+                <a:latin typeface="Courier New" pitchFamily="49" charset="0"/>
+                <a:cs typeface="Courier New" pitchFamily="49" charset="0"/>
+              </a:rPr>
+              <a:t> = 'D';</a:t>
+            </a:r>
+          </a:p>
+          <a:p>
+            <a:pPr algn="just"/>
+            <a:r>
+              <a:rPr lang="ru-RU" dirty="0" smtClean="0">
+                <a:latin typeface="Times New Roman" pitchFamily="18" charset="0"/>
+                <a:cs typeface="Times New Roman" pitchFamily="18" charset="0"/>
+              </a:rPr>
+              <a:t>Логический тип может принимать только два значения:</a:t>
+            </a:r>
+          </a:p>
+          <a:p>
+            <a:pPr algn="just"/>
+            <a:r>
+              <a:rPr lang="ru-RU" dirty="0" err="1">
+                <a:latin typeface="Courier New" pitchFamily="49" charset="0"/>
+                <a:cs typeface="Courier New" pitchFamily="49" charset="0"/>
+              </a:rPr>
+              <a:t>bool</a:t>
+            </a:r>
+            <a:r>
+              <a:rPr lang="ru-RU" dirty="0">
+                <a:latin typeface="Courier New" pitchFamily="49" charset="0"/>
+                <a:cs typeface="Courier New" pitchFamily="49" charset="0"/>
+              </a:rPr>
+              <a:t> </a:t>
+            </a:r>
+            <a:r>
+              <a:rPr lang="ru-RU" dirty="0" err="1">
+                <a:latin typeface="Courier New" pitchFamily="49" charset="0"/>
+                <a:cs typeface="Courier New" pitchFamily="49" charset="0"/>
+              </a:rPr>
+              <a:t>yes</a:t>
+            </a:r>
+            <a:r>
+              <a:rPr lang="ru-RU" dirty="0">
+                <a:latin typeface="Courier New" pitchFamily="49" charset="0"/>
+                <a:cs typeface="Courier New" pitchFamily="49" charset="0"/>
+              </a:rPr>
+              <a:t> = </a:t>
+            </a:r>
+            <a:r>
+              <a:rPr lang="ru-RU" dirty="0" err="1">
+                <a:latin typeface="Courier New" pitchFamily="49" charset="0"/>
+                <a:cs typeface="Courier New" pitchFamily="49" charset="0"/>
+              </a:rPr>
+              <a:t>true</a:t>
+            </a:r>
+            <a:r>
+              <a:rPr lang="ru-RU" dirty="0">
+                <a:latin typeface="Courier New" pitchFamily="49" charset="0"/>
+                <a:cs typeface="Courier New" pitchFamily="49" charset="0"/>
+              </a:rPr>
+              <a:t>; //Истина</a:t>
+            </a:r>
+          </a:p>
+          <a:p>
+            <a:pPr algn="just"/>
+            <a:r>
+              <a:rPr lang="ru-RU" dirty="0" err="1">
+                <a:latin typeface="Courier New" pitchFamily="49" charset="0"/>
+                <a:cs typeface="Courier New" pitchFamily="49" charset="0"/>
+              </a:rPr>
+              <a:t>bool</a:t>
+            </a:r>
+            <a:r>
+              <a:rPr lang="ru-RU" dirty="0">
+                <a:latin typeface="Courier New" pitchFamily="49" charset="0"/>
+                <a:cs typeface="Courier New" pitchFamily="49" charset="0"/>
+              </a:rPr>
+              <a:t> </a:t>
+            </a:r>
+            <a:r>
+              <a:rPr lang="ru-RU" dirty="0" err="1">
+                <a:latin typeface="Courier New" pitchFamily="49" charset="0"/>
+                <a:cs typeface="Courier New" pitchFamily="49" charset="0"/>
+              </a:rPr>
+              <a:t>no</a:t>
+            </a:r>
+            <a:r>
+              <a:rPr lang="ru-RU" dirty="0">
+                <a:latin typeface="Courier New" pitchFamily="49" charset="0"/>
+                <a:cs typeface="Courier New" pitchFamily="49" charset="0"/>
+              </a:rPr>
+              <a:t> = </a:t>
+            </a:r>
+            <a:r>
+              <a:rPr lang="ru-RU" dirty="0" err="1">
+                <a:latin typeface="Courier New" pitchFamily="49" charset="0"/>
+                <a:cs typeface="Courier New" pitchFamily="49" charset="0"/>
+              </a:rPr>
+              <a:t>false</a:t>
+            </a:r>
+            <a:r>
+              <a:rPr lang="ru-RU" dirty="0">
+                <a:latin typeface="Courier New" pitchFamily="49" charset="0"/>
+                <a:cs typeface="Courier New" pitchFamily="49" charset="0"/>
+              </a:rPr>
+              <a:t>; //Ложь</a:t>
+            </a:r>
+          </a:p>
+        </p:txBody>
+      </p:sp>
+    </p:spTree>
+  </p:cSld>
+  <p:clrMapOvr>
+    <a:masterClrMapping/>
+  </p:clrMapOvr>
+</p:sld>
+</file>
+
+<file path=ppt/slides/slide14.xml><?xml version="1.0" encoding="utf-8"?>
+<p:sld xmlns:a="http://schemas.openxmlformats.org/drawingml/2006/main" xmlns:r="http://schemas.openxmlformats.org/officeDocument/2006/relationships" xmlns:p="http://schemas.openxmlformats.org/presentationml/2006/main">
+  <p:cSld>
+    <p:spTree>
+      <p:nvGrpSpPr>
+        <p:cNvPr id="1" name=""/>
+        <p:cNvGrpSpPr/>
+        <p:nvPr/>
+      </p:nvGrpSpPr>
+      <p:grpSpPr>
+        <a:xfrm>
+          <a:off x="0" y="0"/>
+          <a:ext cx="0" cy="0"/>
+          <a:chOff x="0" y="0"/>
+          <a:chExt cx="0" cy="0"/>
+        </a:xfrm>
+      </p:grpSpPr>
+      <p:pic>
+        <p:nvPicPr>
+          <p:cNvPr id="1026" name="Picture 2"/>
+          <p:cNvPicPr>
+            <a:picLocks noChangeAspect="1" noChangeArrowheads="1"/>
+          </p:cNvPicPr>
+          <p:nvPr/>
+        </p:nvPicPr>
+        <p:blipFill>
+          <a:blip r:embed="rId2"/>
+          <a:srcRect/>
+          <a:stretch>
+            <a:fillRect/>
+          </a:stretch>
+        </p:blipFill>
+        <p:spPr bwMode="auto">
+          <a:xfrm>
+            <a:off x="1928794" y="2990000"/>
+            <a:ext cx="4924364" cy="3868000"/>
+          </a:xfrm>
+          <a:prstGeom prst="rect">
+            <a:avLst/>
+          </a:prstGeom>
+          <a:noFill/>
+          <a:ln w="9525">
+            <a:noFill/>
+            <a:miter lim="800000"/>
+            <a:headEnd/>
+            <a:tailEnd/>
+          </a:ln>
+          <a:effectLst/>
+        </p:spPr>
+      </p:pic>
+      <p:sp>
+        <p:nvSpPr>
+          <p:cNvPr id="3" name="Прямоугольник 2"/>
+          <p:cNvSpPr/>
+          <p:nvPr/>
+        </p:nvSpPr>
+        <p:spPr>
+          <a:xfrm>
+            <a:off x="0" y="-79653"/>
+            <a:ext cx="9144000" cy="3046988"/>
+          </a:xfrm>
+          <a:prstGeom prst="rect">
+            <a:avLst/>
+          </a:prstGeom>
+        </p:spPr>
+        <p:txBody>
+          <a:bodyPr wrap="square">
+            <a:spAutoFit/>
+          </a:bodyPr>
+          <a:lstStyle/>
+          <a:p>
+            <a:pPr algn="just"/>
+            <a:r>
+              <a:rPr lang="ru-RU" sz="1600" dirty="0" smtClean="0">
+                <a:latin typeface="Times New Roman" pitchFamily="18" charset="0"/>
+                <a:cs typeface="Times New Roman" pitchFamily="18" charset="0"/>
+              </a:rPr>
+              <a:t>Стек в контексте управления памятью — это специальная область оперативной памяти, выделяемая для каждого потока выполнения в программе. Он работает по принципу LIFO (</a:t>
+            </a:r>
+            <a:r>
+              <a:rPr lang="ru-RU" sz="1600" dirty="0" err="1" smtClean="0">
+                <a:latin typeface="Times New Roman" pitchFamily="18" charset="0"/>
+                <a:cs typeface="Times New Roman" pitchFamily="18" charset="0"/>
+              </a:rPr>
+              <a:t>Last</a:t>
+            </a:r>
+            <a:r>
+              <a:rPr lang="ru-RU" sz="1600" dirty="0" smtClean="0">
+                <a:latin typeface="Times New Roman" pitchFamily="18" charset="0"/>
+                <a:cs typeface="Times New Roman" pitchFamily="18" charset="0"/>
+              </a:rPr>
+              <a:t> </a:t>
+            </a:r>
+            <a:r>
+              <a:rPr lang="ru-RU" sz="1600" dirty="0" err="1" smtClean="0">
+                <a:latin typeface="Times New Roman" pitchFamily="18" charset="0"/>
+                <a:cs typeface="Times New Roman" pitchFamily="18" charset="0"/>
+              </a:rPr>
+              <a:t>In</a:t>
+            </a:r>
+            <a:r>
+              <a:rPr lang="ru-RU" sz="1600" dirty="0" smtClean="0">
+                <a:latin typeface="Times New Roman" pitchFamily="18" charset="0"/>
+                <a:cs typeface="Times New Roman" pitchFamily="18" charset="0"/>
+              </a:rPr>
+              <a:t>, </a:t>
+            </a:r>
+            <a:r>
+              <a:rPr lang="ru-RU" sz="1600" dirty="0" err="1" smtClean="0">
+                <a:latin typeface="Times New Roman" pitchFamily="18" charset="0"/>
+                <a:cs typeface="Times New Roman" pitchFamily="18" charset="0"/>
+              </a:rPr>
+              <a:t>First</a:t>
+            </a:r>
+            <a:r>
+              <a:rPr lang="ru-RU" sz="1600" dirty="0" smtClean="0">
+                <a:latin typeface="Times New Roman" pitchFamily="18" charset="0"/>
+                <a:cs typeface="Times New Roman" pitchFamily="18" charset="0"/>
+              </a:rPr>
+              <a:t> </a:t>
+            </a:r>
+            <a:r>
+              <a:rPr lang="ru-RU" sz="1600" dirty="0" err="1" smtClean="0">
+                <a:latin typeface="Times New Roman" pitchFamily="18" charset="0"/>
+                <a:cs typeface="Times New Roman" pitchFamily="18" charset="0"/>
+              </a:rPr>
+              <a:t>Out</a:t>
+            </a:r>
+            <a:r>
+              <a:rPr lang="ru-RU" sz="1600" dirty="0" smtClean="0">
+                <a:latin typeface="Times New Roman" pitchFamily="18" charset="0"/>
+                <a:cs typeface="Times New Roman" pitchFamily="18" charset="0"/>
+              </a:rPr>
+              <a:t> — «последним пришёл, первым ушёл»).</a:t>
+            </a:r>
+          </a:p>
+          <a:p>
+            <a:pPr algn="just"/>
+            <a:r>
+              <a:rPr lang="ru-RU" sz="1600" dirty="0" smtClean="0">
+                <a:latin typeface="Times New Roman" pitchFamily="18" charset="0"/>
+                <a:cs typeface="Times New Roman" pitchFamily="18" charset="0"/>
+              </a:rPr>
+              <a:t>Ключевые характеристики стека</a:t>
+            </a:r>
+          </a:p>
+          <a:p>
+            <a:pPr algn="just"/>
+            <a:r>
+              <a:rPr lang="ru-RU" sz="1600" dirty="0" smtClean="0">
+                <a:latin typeface="Times New Roman" pitchFamily="18" charset="0"/>
+                <a:cs typeface="Times New Roman" pitchFamily="18" charset="0"/>
+              </a:rPr>
+              <a:t>    Фиксированный размер</a:t>
+            </a:r>
+          </a:p>
+          <a:p>
+            <a:pPr algn="just"/>
+            <a:r>
+              <a:rPr lang="ru-RU" sz="1600" dirty="0" smtClean="0">
+                <a:latin typeface="Times New Roman" pitchFamily="18" charset="0"/>
+                <a:cs typeface="Times New Roman" pitchFamily="18" charset="0"/>
+              </a:rPr>
+              <a:t>    Выделяется при создании потока. Превышение лимита приводит к переполнению стека</a:t>
+            </a:r>
+            <a:r>
+              <a:rPr lang="en-US" sz="1600" dirty="0" smtClean="0">
+                <a:latin typeface="Times New Roman" pitchFamily="18" charset="0"/>
+                <a:cs typeface="Times New Roman" pitchFamily="18" charset="0"/>
+              </a:rPr>
+              <a:t>.</a:t>
+            </a:r>
+            <a:endParaRPr lang="ru-RU" sz="1600" dirty="0" smtClean="0">
+              <a:latin typeface="Times New Roman" pitchFamily="18" charset="0"/>
+              <a:cs typeface="Times New Roman" pitchFamily="18" charset="0"/>
+            </a:endParaRPr>
+          </a:p>
+          <a:p>
+            <a:pPr algn="just"/>
+            <a:r>
+              <a:rPr lang="ru-RU" sz="1600" dirty="0" smtClean="0">
+                <a:latin typeface="Times New Roman" pitchFamily="18" charset="0"/>
+                <a:cs typeface="Times New Roman" pitchFamily="18" charset="0"/>
+              </a:rPr>
+              <a:t>    Автоматическое управление</a:t>
+            </a:r>
+          </a:p>
+          <a:p>
+            <a:pPr algn="just"/>
+            <a:r>
+              <a:rPr lang="ru-RU" sz="1600" dirty="0" smtClean="0">
+                <a:latin typeface="Times New Roman" pitchFamily="18" charset="0"/>
+                <a:cs typeface="Times New Roman" pitchFamily="18" charset="0"/>
+              </a:rPr>
+              <a:t>        При входе в функцию: в стек помещаются её параметры и локальные переменные.</a:t>
+            </a:r>
+          </a:p>
+          <a:p>
+            <a:pPr algn="just"/>
+            <a:r>
+              <a:rPr lang="ru-RU" sz="1600" dirty="0" smtClean="0">
+                <a:latin typeface="Times New Roman" pitchFamily="18" charset="0"/>
+                <a:cs typeface="Times New Roman" pitchFamily="18" charset="0"/>
+              </a:rPr>
+              <a:t>        При выходе из функции: вся память автоматически освобождается.</a:t>
+            </a:r>
+          </a:p>
+          <a:p>
+            <a:pPr algn="just"/>
+            <a:r>
+              <a:rPr lang="ru-RU" sz="1600" dirty="0" smtClean="0">
+                <a:latin typeface="Times New Roman" pitchFamily="18" charset="0"/>
+                <a:cs typeface="Times New Roman" pitchFamily="18" charset="0"/>
+              </a:rPr>
+              <a:t>Благодаря простой логике LIFO и близости к </a:t>
+            </a:r>
+            <a:r>
+              <a:rPr lang="ru-RU" sz="1600" dirty="0" err="1" smtClean="0">
+                <a:latin typeface="Times New Roman" pitchFamily="18" charset="0"/>
+                <a:cs typeface="Times New Roman" pitchFamily="18" charset="0"/>
+              </a:rPr>
+              <a:t>кэшу</a:t>
+            </a:r>
+            <a:r>
+              <a:rPr lang="ru-RU" sz="1600" dirty="0" smtClean="0">
+                <a:latin typeface="Times New Roman" pitchFamily="18" charset="0"/>
+                <a:cs typeface="Times New Roman" pitchFamily="18" charset="0"/>
+              </a:rPr>
+              <a:t> процессора операции со стеком выполняются очень быстро.</a:t>
+            </a:r>
+          </a:p>
+          <a:p>
+            <a:pPr algn="just"/>
+            <a:r>
+              <a:rPr lang="ru-RU" sz="1600" dirty="0" smtClean="0">
+                <a:latin typeface="Times New Roman" pitchFamily="18" charset="0"/>
+                <a:cs typeface="Times New Roman" pitchFamily="18" charset="0"/>
+              </a:rPr>
+              <a:t>Все переменные в стеке — локальные (доступны только в рамках текущей функции/метода).</a:t>
+            </a:r>
+            <a:endParaRPr lang="ru-RU" sz="1600" dirty="0">
+              <a:latin typeface="Times New Roman" pitchFamily="18" charset="0"/>
+              <a:cs typeface="Times New Roman" pitchFamily="18" charset="0"/>
+            </a:endParaRPr>
+          </a:p>
+        </p:txBody>
+      </p:sp>
+    </p:spTree>
+  </p:cSld>
+  <p:clrMapOvr>
+    <a:masterClrMapping/>
+  </p:clrMapOvr>
+</p:sld>
+</file>
+
+<file path=ppt/slides/slide15.xml><?xml version="1.0" encoding="utf-8"?>
+<p:sld xmlns:a="http://schemas.openxmlformats.org/drawingml/2006/main" xmlns:r="http://schemas.openxmlformats.org/officeDocument/2006/relationships" xmlns:p="http://schemas.openxmlformats.org/presentationml/2006/main">
+  <p:cSld>
+    <p:spTree>
+      <p:nvGrpSpPr>
+        <p:cNvPr id="1" name=""/>
+        <p:cNvGrpSpPr/>
+        <p:nvPr/>
+      </p:nvGrpSpPr>
+      <p:grpSpPr>
+        <a:xfrm>
+          <a:off x="0" y="0"/>
+          <a:ext cx="0" cy="0"/>
+          <a:chOff x="0" y="0"/>
+          <a:chExt cx="0" cy="0"/>
+        </a:xfrm>
+      </p:grpSpPr>
+      <p:sp>
+        <p:nvSpPr>
+          <p:cNvPr id="2" name="Прямоугольник 1"/>
+          <p:cNvSpPr/>
+          <p:nvPr/>
+        </p:nvSpPr>
+        <p:spPr>
+          <a:xfrm>
+            <a:off x="0" y="0"/>
+            <a:ext cx="9144000" cy="3693319"/>
+          </a:xfrm>
+          <a:prstGeom prst="rect">
+            <a:avLst/>
+          </a:prstGeom>
+        </p:spPr>
+        <p:txBody>
+          <a:bodyPr wrap="square">
+            <a:spAutoFit/>
+          </a:bodyPr>
+          <a:lstStyle/>
+          <a:p>
+            <a:pPr algn="just"/>
+            <a:r>
+              <a:rPr lang="ru-RU" dirty="0" smtClean="0">
+                <a:latin typeface="Times New Roman" pitchFamily="18" charset="0"/>
+                <a:cs typeface="Times New Roman" pitchFamily="18" charset="0"/>
+              </a:rPr>
+              <a:t>Конвертация данных — преобразование данных из одного формата в другой.</a:t>
+            </a:r>
+          </a:p>
+          <a:p>
+            <a:pPr algn="just"/>
+            <a:r>
+              <a:rPr lang="ru-RU" dirty="0" smtClean="0">
+                <a:latin typeface="Times New Roman" pitchFamily="18" charset="0"/>
+                <a:cs typeface="Times New Roman" pitchFamily="18" charset="0"/>
+              </a:rPr>
+              <a:t>Но зачем конвертировать данные в C#? </a:t>
+            </a:r>
+          </a:p>
+          <a:p>
+            <a:pPr algn="just"/>
+            <a:r>
+              <a:rPr lang="ru-RU" dirty="0" smtClean="0">
+                <a:latin typeface="Times New Roman" pitchFamily="18" charset="0"/>
+                <a:cs typeface="Times New Roman" pitchFamily="18" charset="0"/>
+              </a:rPr>
+              <a:t>При вводе данных в консоль они представлены типом </a:t>
+            </a:r>
+            <a:r>
+              <a:rPr lang="ru-RU" dirty="0" err="1" smtClean="0">
+                <a:latin typeface="Times New Roman" pitchFamily="18" charset="0"/>
+                <a:cs typeface="Times New Roman" pitchFamily="18" charset="0"/>
+              </a:rPr>
+              <a:t>string</a:t>
+            </a:r>
+            <a:r>
+              <a:rPr lang="ru-RU" dirty="0" smtClean="0">
+                <a:latin typeface="Times New Roman" pitchFamily="18" charset="0"/>
+                <a:cs typeface="Times New Roman" pitchFamily="18" charset="0"/>
+              </a:rPr>
+              <a:t>.</a:t>
+            </a:r>
+          </a:p>
+          <a:p>
+            <a:pPr algn="just"/>
+            <a:r>
+              <a:rPr lang="ru-RU" dirty="0" smtClean="0">
+                <a:latin typeface="Times New Roman" pitchFamily="18" charset="0"/>
+                <a:cs typeface="Times New Roman" pitchFamily="18" charset="0"/>
+              </a:rPr>
+              <a:t>Рассмотрим следующую программу:</a:t>
+            </a:r>
+          </a:p>
+          <a:p>
+            <a:pPr algn="just"/>
+            <a:r>
+              <a:rPr lang="ru-RU" dirty="0" err="1" smtClean="0">
+                <a:latin typeface="Courier New" pitchFamily="49" charset="0"/>
+                <a:cs typeface="Courier New" pitchFamily="49" charset="0"/>
+              </a:rPr>
+              <a:t>Console.WriteLine</a:t>
+            </a:r>
+            <a:r>
+              <a:rPr lang="ru-RU" dirty="0" smtClean="0">
+                <a:latin typeface="Courier New" pitchFamily="49" charset="0"/>
+                <a:cs typeface="Courier New" pitchFamily="49" charset="0"/>
+              </a:rPr>
+              <a:t>("Введите число:");</a:t>
+            </a:r>
+          </a:p>
+          <a:p>
+            <a:pPr algn="just"/>
+            <a:r>
+              <a:rPr lang="ru-RU" dirty="0" err="1" smtClean="0">
+                <a:latin typeface="Courier New" pitchFamily="49" charset="0"/>
+                <a:cs typeface="Courier New" pitchFamily="49" charset="0"/>
+              </a:rPr>
+              <a:t>string</a:t>
+            </a:r>
+            <a:r>
+              <a:rPr lang="ru-RU" dirty="0" smtClean="0">
+                <a:latin typeface="Courier New" pitchFamily="49" charset="0"/>
+                <a:cs typeface="Courier New" pitchFamily="49" charset="0"/>
+              </a:rPr>
+              <a:t> </a:t>
+            </a:r>
+            <a:r>
+              <a:rPr lang="ru-RU" dirty="0" err="1" smtClean="0">
+                <a:latin typeface="Courier New" pitchFamily="49" charset="0"/>
+                <a:cs typeface="Courier New" pitchFamily="49" charset="0"/>
+              </a:rPr>
+              <a:t>number</a:t>
+            </a:r>
+            <a:r>
+              <a:rPr lang="ru-RU" dirty="0" smtClean="0">
+                <a:latin typeface="Courier New" pitchFamily="49" charset="0"/>
+                <a:cs typeface="Courier New" pitchFamily="49" charset="0"/>
+              </a:rPr>
+              <a:t> = </a:t>
+            </a:r>
+            <a:r>
+              <a:rPr lang="ru-RU" dirty="0" err="1" smtClean="0">
+                <a:latin typeface="Courier New" pitchFamily="49" charset="0"/>
+                <a:cs typeface="Courier New" pitchFamily="49" charset="0"/>
+              </a:rPr>
+              <a:t>Console.ReadLine</a:t>
+            </a:r>
+            <a:r>
+              <a:rPr lang="ru-RU" dirty="0" smtClean="0">
+                <a:latin typeface="Courier New" pitchFamily="49" charset="0"/>
+                <a:cs typeface="Courier New" pitchFamily="49" charset="0"/>
+              </a:rPr>
+              <a:t>();</a:t>
+            </a:r>
+          </a:p>
+          <a:p>
+            <a:pPr algn="just"/>
+            <a:r>
+              <a:rPr lang="ru-RU" dirty="0" smtClean="0">
+                <a:latin typeface="Times New Roman" pitchFamily="18" charset="0"/>
+                <a:cs typeface="Times New Roman" pitchFamily="18" charset="0"/>
+              </a:rPr>
+              <a:t>Переменная </a:t>
+            </a:r>
+            <a:r>
+              <a:rPr lang="ru-RU" dirty="0" err="1" smtClean="0">
+                <a:latin typeface="Times New Roman" pitchFamily="18" charset="0"/>
+                <a:cs typeface="Times New Roman" pitchFamily="18" charset="0"/>
+              </a:rPr>
+              <a:t>number</a:t>
+            </a:r>
+            <a:r>
+              <a:rPr lang="ru-RU" dirty="0" smtClean="0">
+                <a:latin typeface="Times New Roman" pitchFamily="18" charset="0"/>
+                <a:cs typeface="Times New Roman" pitchFamily="18" charset="0"/>
+              </a:rPr>
+              <a:t> будет иметь тип данных </a:t>
+            </a:r>
+            <a:r>
+              <a:rPr lang="ru-RU" dirty="0" err="1" smtClean="0">
+                <a:latin typeface="Times New Roman" pitchFamily="18" charset="0"/>
+                <a:cs typeface="Times New Roman" pitchFamily="18" charset="0"/>
+              </a:rPr>
+              <a:t>string</a:t>
+            </a:r>
+            <a:r>
+              <a:rPr lang="ru-RU" dirty="0" smtClean="0">
+                <a:latin typeface="Times New Roman" pitchFamily="18" charset="0"/>
+                <a:cs typeface="Times New Roman" pitchFamily="18" charset="0"/>
+              </a:rPr>
+              <a:t>, несмотря на то что в консоль мы введем число.</a:t>
+            </a:r>
+          </a:p>
+          <a:p>
+            <a:pPr algn="just"/>
+            <a:r>
+              <a:rPr lang="ru-RU" dirty="0" smtClean="0">
+                <a:latin typeface="Times New Roman" pitchFamily="18" charset="0"/>
+                <a:cs typeface="Times New Roman" pitchFamily="18" charset="0"/>
+              </a:rPr>
+              <a:t>Это будет выглядеть похожим образом:</a:t>
+            </a:r>
+          </a:p>
+          <a:p>
+            <a:pPr algn="just"/>
+            <a:r>
+              <a:rPr lang="ru-RU" dirty="0" err="1">
+                <a:latin typeface="Courier New" pitchFamily="49" charset="0"/>
+                <a:cs typeface="Courier New" pitchFamily="49" charset="0"/>
+              </a:rPr>
+              <a:t>string</a:t>
+            </a:r>
+            <a:r>
+              <a:rPr lang="ru-RU" dirty="0">
+                <a:latin typeface="Courier New" pitchFamily="49" charset="0"/>
+                <a:cs typeface="Courier New" pitchFamily="49" charset="0"/>
+              </a:rPr>
+              <a:t> </a:t>
+            </a:r>
+            <a:r>
+              <a:rPr lang="ru-RU" dirty="0" err="1">
+                <a:latin typeface="Courier New" pitchFamily="49" charset="0"/>
+                <a:cs typeface="Courier New" pitchFamily="49" charset="0"/>
+              </a:rPr>
+              <a:t>number</a:t>
+            </a:r>
+            <a:r>
+              <a:rPr lang="ru-RU" dirty="0">
+                <a:latin typeface="Courier New" pitchFamily="49" charset="0"/>
+                <a:cs typeface="Courier New" pitchFamily="49" charset="0"/>
+              </a:rPr>
+              <a:t> = "34";</a:t>
+            </a:r>
+          </a:p>
+          <a:p>
+            <a:pPr algn="just"/>
+            <a:r>
+              <a:rPr lang="ru-RU" dirty="0" smtClean="0">
+                <a:latin typeface="Times New Roman" pitchFamily="18" charset="0"/>
+                <a:cs typeface="Times New Roman" pitchFamily="18" charset="0"/>
+              </a:rPr>
+              <a:t>Представим, что нам нужно использовать число 34, например, для сложения, для этого нам надо переменную </a:t>
+            </a:r>
+            <a:r>
+              <a:rPr lang="ru-RU" dirty="0" err="1" smtClean="0">
+                <a:latin typeface="Times New Roman" pitchFamily="18" charset="0"/>
+                <a:cs typeface="Times New Roman" pitchFamily="18" charset="0"/>
+              </a:rPr>
+              <a:t>number</a:t>
+            </a:r>
+            <a:r>
+              <a:rPr lang="ru-RU" dirty="0" smtClean="0">
+                <a:latin typeface="Times New Roman" pitchFamily="18" charset="0"/>
+                <a:cs typeface="Times New Roman" pitchFamily="18" charset="0"/>
+              </a:rPr>
+              <a:t> с типом </a:t>
+            </a:r>
+            <a:r>
+              <a:rPr lang="ru-RU" dirty="0" err="1" smtClean="0">
+                <a:latin typeface="Times New Roman" pitchFamily="18" charset="0"/>
+                <a:cs typeface="Times New Roman" pitchFamily="18" charset="0"/>
+              </a:rPr>
+              <a:t>string</a:t>
+            </a:r>
+            <a:r>
+              <a:rPr lang="ru-RU" dirty="0" smtClean="0">
+                <a:latin typeface="Times New Roman" pitchFamily="18" charset="0"/>
+                <a:cs typeface="Times New Roman" pitchFamily="18" charset="0"/>
+              </a:rPr>
+              <a:t> конвертировать в числовой тип данных. Чтобы совершить данную операцию, существуют специальные методы.</a:t>
+            </a:r>
+            <a:endParaRPr lang="ru-RU" dirty="0">
+              <a:latin typeface="Times New Roman" pitchFamily="18" charset="0"/>
+              <a:cs typeface="Times New Roman" pitchFamily="18" charset="0"/>
+            </a:endParaRPr>
+          </a:p>
+        </p:txBody>
+      </p:sp>
+      <p:sp>
+        <p:nvSpPr>
+          <p:cNvPr id="3" name="Прямоугольник 2"/>
+          <p:cNvSpPr/>
+          <p:nvPr/>
+        </p:nvSpPr>
+        <p:spPr>
+          <a:xfrm>
+            <a:off x="0" y="3714752"/>
+            <a:ext cx="9144000" cy="3139321"/>
+          </a:xfrm>
+          <a:prstGeom prst="rect">
+            <a:avLst/>
+          </a:prstGeom>
+        </p:spPr>
+        <p:txBody>
+          <a:bodyPr wrap="square">
+            <a:spAutoFit/>
+          </a:bodyPr>
+          <a:lstStyle/>
+          <a:p>
+            <a:r>
+              <a:rPr lang="ru-RU" dirty="0" smtClean="0">
+                <a:latin typeface="Times New Roman" pitchFamily="18" charset="0"/>
+                <a:cs typeface="Times New Roman" pitchFamily="18" charset="0"/>
+              </a:rPr>
+              <a:t>Для конвертации данных из строки можно использовать метод </a:t>
+            </a:r>
+            <a:r>
+              <a:rPr lang="ru-RU" dirty="0" err="1" smtClean="0">
+                <a:latin typeface="Times New Roman" pitchFamily="18" charset="0"/>
+                <a:cs typeface="Times New Roman" pitchFamily="18" charset="0"/>
+              </a:rPr>
+              <a:t>Parse</a:t>
+            </a:r>
+            <a:endParaRPr lang="ru-RU" dirty="0" smtClean="0">
+              <a:latin typeface="Times New Roman" pitchFamily="18" charset="0"/>
+              <a:cs typeface="Times New Roman" pitchFamily="18" charset="0"/>
+            </a:endParaRPr>
+          </a:p>
+          <a:p>
+            <a:r>
+              <a:rPr lang="ru-RU" dirty="0" err="1" smtClean="0">
+                <a:latin typeface="Courier New" pitchFamily="49" charset="0"/>
+                <a:cs typeface="Courier New" pitchFamily="49" charset="0"/>
+              </a:rPr>
+              <a:t>int.Parse</a:t>
+            </a:r>
+            <a:r>
+              <a:rPr lang="ru-RU" dirty="0" smtClean="0">
+                <a:latin typeface="Courier New" pitchFamily="49" charset="0"/>
+                <a:cs typeface="Courier New" pitchFamily="49" charset="0"/>
+              </a:rPr>
+              <a:t>("34");</a:t>
+            </a:r>
+          </a:p>
+          <a:p>
+            <a:r>
+              <a:rPr lang="ru-RU" dirty="0" smtClean="0">
+                <a:latin typeface="Times New Roman" pitchFamily="18" charset="0"/>
+                <a:cs typeface="Times New Roman" pitchFamily="18" charset="0"/>
+              </a:rPr>
+              <a:t>Здесь </a:t>
+            </a:r>
+            <a:r>
+              <a:rPr lang="ru-RU" dirty="0" err="1" smtClean="0">
+                <a:latin typeface="Times New Roman" pitchFamily="18" charset="0"/>
+                <a:cs typeface="Times New Roman" pitchFamily="18" charset="0"/>
+              </a:rPr>
+              <a:t>int</a:t>
+            </a:r>
+            <a:r>
+              <a:rPr lang="ru-RU" dirty="0" smtClean="0">
+                <a:latin typeface="Times New Roman" pitchFamily="18" charset="0"/>
+                <a:cs typeface="Times New Roman" pitchFamily="18" charset="0"/>
+              </a:rPr>
+              <a:t> - тип, в который мы хотим преобразовать, а "34" - строковое значение числа.</a:t>
+            </a:r>
+          </a:p>
+          <a:p>
+            <a:r>
+              <a:rPr lang="ru-RU" dirty="0" smtClean="0">
+                <a:latin typeface="Times New Roman" pitchFamily="18" charset="0"/>
+                <a:cs typeface="Times New Roman" pitchFamily="18" charset="0"/>
+              </a:rPr>
+              <a:t>Если мы захотим преобразовать в другой тип, надо использовать его метод </a:t>
+            </a:r>
+            <a:r>
+              <a:rPr lang="ru-RU" dirty="0" err="1" smtClean="0">
+                <a:latin typeface="Times New Roman" pitchFamily="18" charset="0"/>
+                <a:cs typeface="Times New Roman" pitchFamily="18" charset="0"/>
+              </a:rPr>
+              <a:t>Parse</a:t>
+            </a:r>
+            <a:r>
+              <a:rPr lang="ru-RU" dirty="0" smtClean="0">
+                <a:latin typeface="Times New Roman" pitchFamily="18" charset="0"/>
+                <a:cs typeface="Times New Roman" pitchFamily="18" charset="0"/>
+              </a:rPr>
+              <a:t>()</a:t>
+            </a:r>
+          </a:p>
+          <a:p>
+            <a:r>
+              <a:rPr lang="ru-RU" dirty="0" err="1">
+                <a:latin typeface="Courier New" pitchFamily="49" charset="0"/>
+                <a:cs typeface="Courier New" pitchFamily="49" charset="0"/>
+              </a:rPr>
+              <a:t>double.Parse</a:t>
+            </a:r>
+            <a:r>
+              <a:rPr lang="ru-RU" dirty="0">
+                <a:latin typeface="Courier New" pitchFamily="49" charset="0"/>
+                <a:cs typeface="Courier New" pitchFamily="49" charset="0"/>
+              </a:rPr>
+              <a:t>("3.14");</a:t>
+            </a:r>
+          </a:p>
+          <a:p>
+            <a:r>
+              <a:rPr lang="ru-RU" dirty="0" err="1">
+                <a:latin typeface="Courier New" pitchFamily="49" charset="0"/>
+                <a:cs typeface="Courier New" pitchFamily="49" charset="0"/>
+              </a:rPr>
+              <a:t>byte.Parse</a:t>
+            </a:r>
+            <a:r>
+              <a:rPr lang="ru-RU" dirty="0">
+                <a:latin typeface="Courier New" pitchFamily="49" charset="0"/>
+                <a:cs typeface="Courier New" pitchFamily="49" charset="0"/>
+              </a:rPr>
+              <a:t>("128");</a:t>
+            </a:r>
+          </a:p>
+          <a:p>
+            <a:r>
+              <a:rPr lang="ru-RU" dirty="0" smtClean="0">
+                <a:latin typeface="Times New Roman" pitchFamily="18" charset="0"/>
+                <a:cs typeface="Times New Roman" pitchFamily="18" charset="0"/>
+              </a:rPr>
+              <a:t>Для использования результата конвертации его лучше сохранить в переменную:</a:t>
+            </a:r>
+          </a:p>
+          <a:p>
+            <a:r>
+              <a:rPr lang="ru-RU" dirty="0" err="1">
+                <a:latin typeface="Courier New" pitchFamily="49" charset="0"/>
+                <a:cs typeface="Courier New" pitchFamily="49" charset="0"/>
+              </a:rPr>
+              <a:t>int</a:t>
+            </a:r>
+            <a:r>
+              <a:rPr lang="ru-RU" dirty="0">
+                <a:latin typeface="Courier New" pitchFamily="49" charset="0"/>
+                <a:cs typeface="Courier New" pitchFamily="49" charset="0"/>
+              </a:rPr>
+              <a:t> </a:t>
+            </a:r>
+            <a:r>
+              <a:rPr lang="ru-RU" dirty="0" err="1">
+                <a:latin typeface="Courier New" pitchFamily="49" charset="0"/>
+                <a:cs typeface="Courier New" pitchFamily="49" charset="0"/>
+              </a:rPr>
+              <a:t>a</a:t>
+            </a:r>
+            <a:r>
+              <a:rPr lang="ru-RU" dirty="0">
+                <a:latin typeface="Courier New" pitchFamily="49" charset="0"/>
+                <a:cs typeface="Courier New" pitchFamily="49" charset="0"/>
+              </a:rPr>
+              <a:t> = </a:t>
+            </a:r>
+            <a:r>
+              <a:rPr lang="ru-RU" dirty="0" err="1">
+                <a:latin typeface="Courier New" pitchFamily="49" charset="0"/>
+                <a:cs typeface="Courier New" pitchFamily="49" charset="0"/>
+              </a:rPr>
+              <a:t>int.Parse</a:t>
+            </a:r>
+            <a:r>
+              <a:rPr lang="ru-RU" dirty="0">
+                <a:latin typeface="Courier New" pitchFamily="49" charset="0"/>
+                <a:cs typeface="Courier New" pitchFamily="49" charset="0"/>
+              </a:rPr>
+              <a:t>("34");</a:t>
+            </a:r>
+          </a:p>
+          <a:p>
+            <a:r>
+              <a:rPr lang="ru-RU" dirty="0" smtClean="0">
+                <a:latin typeface="Times New Roman" pitchFamily="18" charset="0"/>
+                <a:cs typeface="Times New Roman" pitchFamily="18" charset="0"/>
+              </a:rPr>
+              <a:t>Таким образом при помощи метода </a:t>
+            </a:r>
+            <a:r>
+              <a:rPr lang="ru-RU" dirty="0" err="1" smtClean="0">
+                <a:latin typeface="Times New Roman" pitchFamily="18" charset="0"/>
+                <a:cs typeface="Times New Roman" pitchFamily="18" charset="0"/>
+              </a:rPr>
+              <a:t>Parse</a:t>
+            </a:r>
+            <a:r>
+              <a:rPr lang="ru-RU" dirty="0" smtClean="0">
+                <a:latin typeface="Times New Roman" pitchFamily="18" charset="0"/>
+                <a:cs typeface="Times New Roman" pitchFamily="18" charset="0"/>
+              </a:rPr>
+              <a:t> мы можем преобразовывать строку в соответствующий тип. </a:t>
+            </a:r>
+            <a:endParaRPr lang="en-US" dirty="0" smtClean="0">
+              <a:latin typeface="Times New Roman" pitchFamily="18" charset="0"/>
+              <a:cs typeface="Times New Roman" pitchFamily="18" charset="0"/>
+            </a:endParaRPr>
+          </a:p>
+          <a:p>
+            <a:r>
+              <a:rPr lang="en-US" dirty="0" err="1">
+                <a:latin typeface="Courier New" pitchFamily="49" charset="0"/>
+                <a:cs typeface="Courier New" pitchFamily="49" charset="0"/>
+              </a:rPr>
+              <a:t>int</a:t>
+            </a:r>
+            <a:r>
+              <a:rPr lang="en-US" dirty="0">
+                <a:latin typeface="Courier New" pitchFamily="49" charset="0"/>
+                <a:cs typeface="Courier New" pitchFamily="49" charset="0"/>
+              </a:rPr>
+              <a:t> a = </a:t>
+            </a:r>
+            <a:r>
+              <a:rPr lang="en-US" dirty="0" err="1">
+                <a:latin typeface="Courier New" pitchFamily="49" charset="0"/>
+                <a:cs typeface="Courier New" pitchFamily="49" charset="0"/>
+              </a:rPr>
+              <a:t>int.Parse</a:t>
+            </a:r>
+            <a:r>
+              <a:rPr lang="en-US" dirty="0">
+                <a:latin typeface="Courier New" pitchFamily="49" charset="0"/>
+                <a:cs typeface="Courier New" pitchFamily="49" charset="0"/>
+              </a:rPr>
+              <a:t>(</a:t>
+            </a:r>
+            <a:r>
+              <a:rPr lang="en-US" dirty="0" err="1">
+                <a:latin typeface="Courier New" pitchFamily="49" charset="0"/>
+                <a:cs typeface="Courier New" pitchFamily="49" charset="0"/>
+              </a:rPr>
+              <a:t>Console.ReadLine</a:t>
+            </a:r>
+            <a:r>
+              <a:rPr lang="en-US" dirty="0">
+                <a:latin typeface="Courier New" pitchFamily="49" charset="0"/>
+                <a:cs typeface="Courier New" pitchFamily="49" charset="0"/>
+              </a:rPr>
+              <a:t>());</a:t>
+            </a:r>
+            <a:endParaRPr lang="ru-RU" dirty="0">
+              <a:latin typeface="Courier New" pitchFamily="49" charset="0"/>
+              <a:cs typeface="Courier New" pitchFamily="49" charset="0"/>
+            </a:endParaRPr>
+          </a:p>
+        </p:txBody>
+      </p:sp>
+    </p:spTree>
+  </p:cSld>
+  <p:clrMapOvr>
+    <a:masterClrMapping/>
+  </p:clrMapOvr>
+</p:sld>
+</file>
+
+<file path=ppt/slides/slide16.xml><?xml version="1.0" encoding="utf-8"?>
+<p:sld xmlns:a="http://schemas.openxmlformats.org/drawingml/2006/main" xmlns:r="http://schemas.openxmlformats.org/officeDocument/2006/relationships" xmlns:p="http://schemas.openxmlformats.org/presentationml/2006/main">
+  <p:cSld>
+    <p:spTree>
+      <p:nvGrpSpPr>
+        <p:cNvPr id="1" name=""/>
+        <p:cNvGrpSpPr/>
+        <p:nvPr/>
+      </p:nvGrpSpPr>
+      <p:grpSpPr>
+        <a:xfrm>
+          <a:off x="0" y="0"/>
+          <a:ext cx="0" cy="0"/>
+          <a:chOff x="0" y="0"/>
+          <a:chExt cx="0" cy="0"/>
+        </a:xfrm>
+      </p:grpSpPr>
+      <p:sp>
+        <p:nvSpPr>
+          <p:cNvPr id="3" name="Прямоугольник 2"/>
+          <p:cNvSpPr/>
+          <p:nvPr/>
+        </p:nvSpPr>
+        <p:spPr>
+          <a:xfrm>
+            <a:off x="0" y="0"/>
+            <a:ext cx="9144000" cy="3416320"/>
+          </a:xfrm>
+          <a:prstGeom prst="rect">
+            <a:avLst/>
+          </a:prstGeom>
+        </p:spPr>
+        <p:txBody>
+          <a:bodyPr wrap="square">
+            <a:spAutoFit/>
+          </a:bodyPr>
+          <a:lstStyle/>
+          <a:p>
+            <a:pPr algn="just"/>
+            <a:r>
+              <a:rPr lang="ru-RU" dirty="0" smtClean="0">
+                <a:latin typeface="Times New Roman" pitchFamily="18" charset="0"/>
+                <a:cs typeface="Times New Roman" pitchFamily="18" charset="0"/>
+              </a:rPr>
+              <a:t>Для конвертации данных из любого типа в любой можно использовать класс </a:t>
+            </a:r>
+            <a:r>
+              <a:rPr lang="ru-RU" dirty="0" err="1" smtClean="0">
+                <a:latin typeface="Times New Roman" pitchFamily="18" charset="0"/>
+                <a:cs typeface="Times New Roman" pitchFamily="18" charset="0"/>
+              </a:rPr>
+              <a:t>Convert</a:t>
+            </a:r>
+            <a:endParaRPr lang="ru-RU" dirty="0" smtClean="0">
+              <a:latin typeface="Times New Roman" pitchFamily="18" charset="0"/>
+              <a:cs typeface="Times New Roman" pitchFamily="18" charset="0"/>
+            </a:endParaRPr>
+          </a:p>
+          <a:p>
+            <a:pPr algn="just"/>
+            <a:r>
+              <a:rPr lang="ru-RU" dirty="0" smtClean="0">
+                <a:latin typeface="Courier New" pitchFamily="49" charset="0"/>
+                <a:cs typeface="Courier New" pitchFamily="49" charset="0"/>
+              </a:rPr>
+              <a:t>Convert.ToInt32("34");</a:t>
+            </a:r>
+          </a:p>
+          <a:p>
+            <a:pPr algn="just"/>
+            <a:r>
+              <a:rPr lang="ru-RU" dirty="0" smtClean="0">
+                <a:latin typeface="Times New Roman" pitchFamily="18" charset="0"/>
+                <a:cs typeface="Times New Roman" pitchFamily="18" charset="0"/>
+              </a:rPr>
+              <a:t>Здесь Int32 - название типа в библиотеке .NET (согласно таблице), в который мы хотим преобразовать, а "34" - строковое значение числа.</a:t>
+            </a:r>
+          </a:p>
+          <a:p>
+            <a:pPr algn="just"/>
+            <a:r>
+              <a:rPr lang="ru-RU" dirty="0" smtClean="0">
+                <a:latin typeface="Times New Roman" pitchFamily="18" charset="0"/>
+                <a:cs typeface="Times New Roman" pitchFamily="18" charset="0"/>
+              </a:rPr>
+              <a:t>Если мы захотим преобразовать в другой тип, надо использовать его название в библиотеке .NET.</a:t>
+            </a:r>
+          </a:p>
+          <a:p>
+            <a:pPr algn="just"/>
+            <a:r>
+              <a:rPr lang="ru-RU" dirty="0" err="1">
+                <a:latin typeface="Courier New" pitchFamily="49" charset="0"/>
+                <a:cs typeface="Courier New" pitchFamily="49" charset="0"/>
+              </a:rPr>
+              <a:t>Convert.ToChar</a:t>
+            </a:r>
+            <a:r>
+              <a:rPr lang="ru-RU" dirty="0">
+                <a:latin typeface="Courier New" pitchFamily="49" charset="0"/>
+                <a:cs typeface="Courier New" pitchFamily="49" charset="0"/>
+              </a:rPr>
+              <a:t>("!");</a:t>
+            </a:r>
+          </a:p>
+          <a:p>
+            <a:pPr algn="just"/>
+            <a:r>
+              <a:rPr lang="ru-RU" dirty="0" err="1">
+                <a:latin typeface="Courier New" pitchFamily="49" charset="0"/>
+                <a:cs typeface="Courier New" pitchFamily="49" charset="0"/>
+              </a:rPr>
+              <a:t>Convert.ToBoolean</a:t>
+            </a:r>
+            <a:r>
+              <a:rPr lang="ru-RU" dirty="0">
+                <a:latin typeface="Courier New" pitchFamily="49" charset="0"/>
+                <a:cs typeface="Courier New" pitchFamily="49" charset="0"/>
+              </a:rPr>
+              <a:t>("</a:t>
+            </a:r>
+            <a:r>
+              <a:rPr lang="ru-RU" dirty="0" err="1">
+                <a:latin typeface="Courier New" pitchFamily="49" charset="0"/>
+                <a:cs typeface="Courier New" pitchFamily="49" charset="0"/>
+              </a:rPr>
+              <a:t>True</a:t>
+            </a:r>
+            <a:r>
+              <a:rPr lang="ru-RU" dirty="0">
+                <a:latin typeface="Courier New" pitchFamily="49" charset="0"/>
+                <a:cs typeface="Courier New" pitchFamily="49" charset="0"/>
+              </a:rPr>
+              <a:t>");</a:t>
+            </a:r>
+          </a:p>
+          <a:p>
+            <a:pPr algn="just"/>
+            <a:r>
+              <a:rPr lang="ru-RU" dirty="0" smtClean="0">
+                <a:latin typeface="Times New Roman" pitchFamily="18" charset="0"/>
+                <a:cs typeface="Times New Roman" pitchFamily="18" charset="0"/>
+              </a:rPr>
+              <a:t>Для использования результата конвертации его лучше сохранить в переменную:</a:t>
+            </a:r>
+          </a:p>
+          <a:p>
+            <a:pPr algn="just"/>
+            <a:r>
+              <a:rPr lang="ru-RU" dirty="0" err="1">
+                <a:latin typeface="Courier New" pitchFamily="49" charset="0"/>
+                <a:cs typeface="Courier New" pitchFamily="49" charset="0"/>
+              </a:rPr>
+              <a:t>string</a:t>
+            </a:r>
+            <a:r>
+              <a:rPr lang="ru-RU" dirty="0">
+                <a:latin typeface="Courier New" pitchFamily="49" charset="0"/>
+                <a:cs typeface="Courier New" pitchFamily="49" charset="0"/>
+              </a:rPr>
+              <a:t> </a:t>
+            </a:r>
+            <a:r>
+              <a:rPr lang="ru-RU" dirty="0" err="1">
+                <a:latin typeface="Courier New" pitchFamily="49" charset="0"/>
+                <a:cs typeface="Courier New" pitchFamily="49" charset="0"/>
+              </a:rPr>
+              <a:t>a</a:t>
+            </a:r>
+            <a:r>
+              <a:rPr lang="ru-RU" dirty="0">
+                <a:latin typeface="Courier New" pitchFamily="49" charset="0"/>
+                <a:cs typeface="Courier New" pitchFamily="49" charset="0"/>
+              </a:rPr>
+              <a:t> = </a:t>
+            </a:r>
+            <a:r>
+              <a:rPr lang="ru-RU" dirty="0" err="1">
+                <a:latin typeface="Courier New" pitchFamily="49" charset="0"/>
+                <a:cs typeface="Courier New" pitchFamily="49" charset="0"/>
+              </a:rPr>
+              <a:t>Convert.ToString</a:t>
+            </a:r>
+            <a:r>
+              <a:rPr lang="ru-RU" dirty="0">
+                <a:latin typeface="Courier New" pitchFamily="49" charset="0"/>
+                <a:cs typeface="Courier New" pitchFamily="49" charset="0"/>
+              </a:rPr>
+              <a:t>('!');</a:t>
+            </a:r>
+          </a:p>
+          <a:p>
+            <a:pPr algn="just"/>
+            <a:r>
+              <a:rPr lang="ru-RU" dirty="0" smtClean="0">
+                <a:latin typeface="Times New Roman" pitchFamily="18" charset="0"/>
+                <a:cs typeface="Times New Roman" pitchFamily="18" charset="0"/>
+              </a:rPr>
+              <a:t>Таким образом при помощи класса </a:t>
+            </a:r>
+            <a:r>
+              <a:rPr lang="ru-RU" dirty="0" err="1" smtClean="0">
+                <a:latin typeface="Times New Roman" pitchFamily="18" charset="0"/>
+                <a:cs typeface="Times New Roman" pitchFamily="18" charset="0"/>
+              </a:rPr>
+              <a:t>Convert</a:t>
+            </a:r>
+            <a:r>
+              <a:rPr lang="ru-RU" dirty="0" smtClean="0">
+                <a:latin typeface="Times New Roman" pitchFamily="18" charset="0"/>
+                <a:cs typeface="Times New Roman" pitchFamily="18" charset="0"/>
+              </a:rPr>
+              <a:t> мы можем преобразовывать любые типы данных. </a:t>
+            </a:r>
+            <a:endParaRPr lang="ru-RU" dirty="0">
+              <a:latin typeface="Times New Roman" pitchFamily="18" charset="0"/>
+              <a:cs typeface="Times New Roman" pitchFamily="18" charset="0"/>
+            </a:endParaRPr>
+          </a:p>
+        </p:txBody>
+      </p:sp>
+      <p:pic>
+        <p:nvPicPr>
+          <p:cNvPr id="16386" name="Picture 2"/>
+          <p:cNvPicPr>
+            <a:picLocks noChangeAspect="1" noChangeArrowheads="1"/>
+          </p:cNvPicPr>
+          <p:nvPr/>
+        </p:nvPicPr>
+        <p:blipFill>
+          <a:blip r:embed="rId2"/>
+          <a:srcRect/>
+          <a:stretch>
+            <a:fillRect/>
+          </a:stretch>
+        </p:blipFill>
+        <p:spPr bwMode="auto">
+          <a:xfrm>
+            <a:off x="1785918" y="3714752"/>
+            <a:ext cx="5201366" cy="1571636"/>
+          </a:xfrm>
+          <a:prstGeom prst="rect">
+            <a:avLst/>
+          </a:prstGeom>
+          <a:noFill/>
+          <a:ln w="9525">
+            <a:noFill/>
+            <a:miter lim="800000"/>
+            <a:headEnd/>
+            <a:tailEnd/>
+          </a:ln>
+          <a:effectLst/>
+        </p:spPr>
+      </p:pic>
+      <p:sp>
+        <p:nvSpPr>
+          <p:cNvPr id="5" name="Прямоугольник 4"/>
+          <p:cNvSpPr/>
+          <p:nvPr/>
+        </p:nvSpPr>
+        <p:spPr>
+          <a:xfrm>
+            <a:off x="2857488" y="5357826"/>
+            <a:ext cx="2848665" cy="369332"/>
+          </a:xfrm>
+          <a:prstGeom prst="rect">
+            <a:avLst/>
+          </a:prstGeom>
+        </p:spPr>
+        <p:txBody>
+          <a:bodyPr wrap="none">
+            <a:spAutoFit/>
+          </a:bodyPr>
+          <a:lstStyle/>
+          <a:p>
+            <a:r>
+              <a:rPr lang="ru-RU" b="1" dirty="0" smtClean="0"/>
+              <a:t>Чему равны переменные?</a:t>
+            </a:r>
+            <a:endParaRPr lang="ru-RU" b="1" dirty="0"/>
+          </a:p>
+        </p:txBody>
+      </p:sp>
+    </p:spTree>
+  </p:cSld>
+  <p:clrMapOvr>
+    <a:masterClrMapping/>
+  </p:clrMapOvr>
+</p:sld>
+</file>
+
+<file path=ppt/slides/slide17.xml><?xml version="1.0" encoding="utf-8"?>
+<p:sld xmlns:a="http://schemas.openxmlformats.org/drawingml/2006/main" xmlns:r="http://schemas.openxmlformats.org/officeDocument/2006/relationships" xmlns:p="http://schemas.openxmlformats.org/presentationml/2006/main">
+  <p:cSld>
+    <p:spTree>
+      <p:nvGrpSpPr>
+        <p:cNvPr id="1" name=""/>
+        <p:cNvGrpSpPr/>
+        <p:nvPr/>
+      </p:nvGrpSpPr>
+      <p:grpSpPr>
+        <a:xfrm>
+          <a:off x="0" y="0"/>
+          <a:ext cx="0" cy="0"/>
+          <a:chOff x="0" y="0"/>
+          <a:chExt cx="0" cy="0"/>
+        </a:xfrm>
+      </p:grpSpPr>
+      <p:sp>
+        <p:nvSpPr>
+          <p:cNvPr id="2" name="Прямоугольник 1"/>
+          <p:cNvSpPr/>
+          <p:nvPr/>
+        </p:nvSpPr>
+        <p:spPr>
+          <a:xfrm>
+            <a:off x="0" y="0"/>
+            <a:ext cx="9144000" cy="1200329"/>
+          </a:xfrm>
+          <a:prstGeom prst="rect">
+            <a:avLst/>
+          </a:prstGeom>
+        </p:spPr>
+        <p:txBody>
+          <a:bodyPr wrap="square">
+            <a:spAutoFit/>
+          </a:bodyPr>
+          <a:lstStyle/>
+          <a:p>
+            <a:pPr algn="just"/>
+            <a:r>
+              <a:rPr lang="ru-RU" dirty="0" smtClean="0">
+                <a:latin typeface="Times New Roman" pitchFamily="18" charset="0"/>
+                <a:cs typeface="Times New Roman" pitchFamily="18" charset="0"/>
+              </a:rPr>
+              <a:t>Нередко бывает удобно, чтобы переменная/параметр значимого типа могли принимать значение </a:t>
+            </a:r>
+            <a:r>
+              <a:rPr lang="ru-RU" dirty="0" err="1" smtClean="0">
+                <a:latin typeface="Times New Roman" pitchFamily="18" charset="0"/>
+                <a:cs typeface="Times New Roman" pitchFamily="18" charset="0"/>
+              </a:rPr>
+              <a:t>null</a:t>
+            </a:r>
+            <a:r>
+              <a:rPr lang="ru-RU" dirty="0" smtClean="0">
+                <a:latin typeface="Times New Roman" pitchFamily="18" charset="0"/>
+                <a:cs typeface="Times New Roman" pitchFamily="18" charset="0"/>
+              </a:rPr>
+              <a:t>, Например, получаем числовое значение из базы данных, которое в </a:t>
+            </a:r>
+            <a:r>
+              <a:rPr lang="ru-RU" dirty="0" err="1" smtClean="0">
+                <a:latin typeface="Times New Roman" pitchFamily="18" charset="0"/>
+                <a:cs typeface="Times New Roman" pitchFamily="18" charset="0"/>
+              </a:rPr>
+              <a:t>бд</a:t>
+            </a:r>
+            <a:r>
+              <a:rPr lang="ru-RU" dirty="0" smtClean="0">
+                <a:latin typeface="Times New Roman" pitchFamily="18" charset="0"/>
+                <a:cs typeface="Times New Roman" pitchFamily="18" charset="0"/>
+              </a:rPr>
+              <a:t> может отсутствовать. То есть, если значение в базе данных есть - получим число, если нет - то </a:t>
+            </a:r>
+            <a:r>
+              <a:rPr lang="ru-RU" dirty="0" err="1" smtClean="0">
+                <a:latin typeface="Times New Roman" pitchFamily="18" charset="0"/>
+                <a:cs typeface="Times New Roman" pitchFamily="18" charset="0"/>
+              </a:rPr>
+              <a:t>null</a:t>
+            </a:r>
+            <a:r>
+              <a:rPr lang="ru-RU" dirty="0" smtClean="0">
+                <a:latin typeface="Times New Roman" pitchFamily="18" charset="0"/>
+                <a:cs typeface="Times New Roman" pitchFamily="18" charset="0"/>
+              </a:rPr>
+              <a:t>.</a:t>
+            </a:r>
+            <a:endParaRPr lang="ru-RU" dirty="0">
+              <a:latin typeface="Times New Roman" pitchFamily="18" charset="0"/>
+              <a:cs typeface="Times New Roman" pitchFamily="18" charset="0"/>
+            </a:endParaRPr>
+          </a:p>
+        </p:txBody>
+      </p:sp>
+      <p:pic>
+        <p:nvPicPr>
+          <p:cNvPr id="2050" name="Picture 2"/>
+          <p:cNvPicPr>
+            <a:picLocks noChangeAspect="1" noChangeArrowheads="1"/>
+          </p:cNvPicPr>
+          <p:nvPr/>
+        </p:nvPicPr>
+        <p:blipFill>
+          <a:blip r:embed="rId2"/>
+          <a:srcRect/>
+          <a:stretch>
+            <a:fillRect/>
+          </a:stretch>
+        </p:blipFill>
+        <p:spPr bwMode="auto">
+          <a:xfrm>
+            <a:off x="0" y="1185881"/>
+            <a:ext cx="9144000" cy="4171945"/>
+          </a:xfrm>
+          <a:prstGeom prst="rect">
+            <a:avLst/>
+          </a:prstGeom>
+          <a:noFill/>
+          <a:ln w="9525">
+            <a:noFill/>
+            <a:miter lim="800000"/>
+            <a:headEnd/>
+            <a:tailEnd/>
+          </a:ln>
+          <a:effectLst/>
+        </p:spPr>
+      </p:pic>
+      <p:pic>
+        <p:nvPicPr>
+          <p:cNvPr id="2051" name="Picture 3"/>
+          <p:cNvPicPr>
+            <a:picLocks noChangeAspect="1" noChangeArrowheads="1"/>
+          </p:cNvPicPr>
+          <p:nvPr/>
+        </p:nvPicPr>
+        <p:blipFill>
+          <a:blip r:embed="rId3"/>
+          <a:srcRect/>
+          <a:stretch>
+            <a:fillRect/>
+          </a:stretch>
+        </p:blipFill>
+        <p:spPr bwMode="auto">
+          <a:xfrm>
+            <a:off x="0" y="5429264"/>
+            <a:ext cx="9144000" cy="1428736"/>
+          </a:xfrm>
+          <a:prstGeom prst="rect">
+            <a:avLst/>
+          </a:prstGeom>
+          <a:noFill/>
+          <a:ln w="9525">
+            <a:noFill/>
+            <a:miter lim="800000"/>
+            <a:headEnd/>
+            <a:tailEnd/>
+          </a:ln>
+          <a:effectLst/>
+        </p:spPr>
+      </p:pic>
+    </p:spTree>
+  </p:cSld>
+  <p:clrMapOvr>
+    <a:masterClrMapping/>
+  </p:clrMapOvr>
+</p:sld>
+</file>
+
+<file path=ppt/slides/slide18.xml><?xml version="1.0" encoding="utf-8"?>
+<p:sld xmlns:a="http://schemas.openxmlformats.org/drawingml/2006/main" xmlns:r="http://schemas.openxmlformats.org/officeDocument/2006/relationships" xmlns:p="http://schemas.openxmlformats.org/presentationml/2006/main">
+  <p:cSld>
+    <p:spTree>
+      <p:nvGrpSpPr>
+        <p:cNvPr id="1" name=""/>
+        <p:cNvGrpSpPr/>
+        <p:nvPr/>
+      </p:nvGrpSpPr>
+      <p:grpSpPr>
+        <a:xfrm>
+          <a:off x="0" y="0"/>
+          <a:ext cx="0" cy="0"/>
+          <a:chOff x="0" y="0"/>
+          <a:chExt cx="0" cy="0"/>
+        </a:xfrm>
+      </p:grpSpPr>
+      <p:pic>
+        <p:nvPicPr>
+          <p:cNvPr id="18434" name="Picture 2"/>
+          <p:cNvPicPr>
+            <a:picLocks noChangeAspect="1" noChangeArrowheads="1"/>
+          </p:cNvPicPr>
+          <p:nvPr/>
+        </p:nvPicPr>
+        <p:blipFill>
+          <a:blip r:embed="rId2"/>
+          <a:srcRect t="5556"/>
+          <a:stretch>
+            <a:fillRect/>
+          </a:stretch>
+        </p:blipFill>
+        <p:spPr bwMode="auto">
+          <a:xfrm>
+            <a:off x="0" y="764704"/>
+            <a:ext cx="4305300" cy="1214437"/>
+          </a:xfrm>
+          <a:prstGeom prst="rect">
+            <a:avLst/>
+          </a:prstGeom>
+          <a:noFill/>
+          <a:ln w="9525">
+            <a:noFill/>
+            <a:miter lim="800000"/>
+            <a:headEnd/>
+            <a:tailEnd/>
+          </a:ln>
+          <a:effectLst/>
+        </p:spPr>
+      </p:pic>
+      <p:sp>
+        <p:nvSpPr>
+          <p:cNvPr id="3" name="Прямоугольник 2"/>
+          <p:cNvSpPr/>
+          <p:nvPr/>
+        </p:nvSpPr>
+        <p:spPr>
+          <a:xfrm>
+            <a:off x="285720" y="1979548"/>
+            <a:ext cx="2493055" cy="369332"/>
+          </a:xfrm>
+          <a:prstGeom prst="rect">
+            <a:avLst/>
+          </a:prstGeom>
+        </p:spPr>
+        <p:txBody>
+          <a:bodyPr wrap="none">
+            <a:spAutoFit/>
+          </a:bodyPr>
+          <a:lstStyle/>
+          <a:p>
+            <a:r>
+              <a:rPr lang="ru-RU" dirty="0"/>
+              <a:t>Локальная переменная</a:t>
+            </a:r>
+          </a:p>
+        </p:txBody>
+      </p:sp>
+      <p:pic>
+        <p:nvPicPr>
+          <p:cNvPr id="18435" name="Picture 3"/>
+          <p:cNvPicPr>
+            <a:picLocks noChangeAspect="1" noChangeArrowheads="1"/>
+          </p:cNvPicPr>
+          <p:nvPr/>
+        </p:nvPicPr>
+        <p:blipFill>
+          <a:blip r:embed="rId3"/>
+          <a:srcRect/>
+          <a:stretch>
+            <a:fillRect/>
+          </a:stretch>
+        </p:blipFill>
+        <p:spPr bwMode="auto">
+          <a:xfrm>
+            <a:off x="4357686" y="328439"/>
+            <a:ext cx="4786314" cy="1876425"/>
+          </a:xfrm>
+          <a:prstGeom prst="rect">
+            <a:avLst/>
+          </a:prstGeom>
+          <a:noFill/>
+          <a:ln w="9525">
+            <a:noFill/>
+            <a:miter lim="800000"/>
+            <a:headEnd/>
+            <a:tailEnd/>
+          </a:ln>
+          <a:effectLst/>
+        </p:spPr>
+      </p:pic>
+      <p:sp>
+        <p:nvSpPr>
+          <p:cNvPr id="5" name="Прямоугольник 4"/>
+          <p:cNvSpPr/>
+          <p:nvPr/>
+        </p:nvSpPr>
+        <p:spPr>
+          <a:xfrm>
+            <a:off x="5286380" y="2123564"/>
+            <a:ext cx="2854308" cy="369332"/>
+          </a:xfrm>
+          <a:prstGeom prst="rect">
+            <a:avLst/>
+          </a:prstGeom>
+        </p:spPr>
+        <p:txBody>
+          <a:bodyPr wrap="none">
+            <a:spAutoFit/>
+          </a:bodyPr>
+          <a:lstStyle/>
+          <a:p>
+            <a:r>
+              <a:rPr lang="ru-RU" dirty="0"/>
+              <a:t>Переменная уровня класса</a:t>
+            </a:r>
+          </a:p>
+        </p:txBody>
+      </p:sp>
+      <p:pic>
+        <p:nvPicPr>
+          <p:cNvPr id="18436" name="Picture 4"/>
+          <p:cNvPicPr>
+            <a:picLocks noChangeAspect="1" noChangeArrowheads="1"/>
+          </p:cNvPicPr>
+          <p:nvPr/>
+        </p:nvPicPr>
+        <p:blipFill>
+          <a:blip r:embed="rId4"/>
+          <a:srcRect/>
+          <a:stretch>
+            <a:fillRect/>
+          </a:stretch>
+        </p:blipFill>
+        <p:spPr bwMode="auto">
+          <a:xfrm>
+            <a:off x="2062779" y="2688048"/>
+            <a:ext cx="4686300" cy="1076325"/>
+          </a:xfrm>
+          <a:prstGeom prst="rect">
+            <a:avLst/>
+          </a:prstGeom>
+          <a:noFill/>
+          <a:ln w="9525">
+            <a:noFill/>
+            <a:miter lim="800000"/>
+            <a:headEnd/>
+            <a:tailEnd/>
+          </a:ln>
+          <a:effectLst/>
+        </p:spPr>
+      </p:pic>
+      <p:sp>
+        <p:nvSpPr>
+          <p:cNvPr id="7" name="Прямоугольник 6"/>
+          <p:cNvSpPr/>
+          <p:nvPr/>
+        </p:nvSpPr>
+        <p:spPr>
+          <a:xfrm>
+            <a:off x="3332686" y="3845346"/>
+            <a:ext cx="2146485" cy="369332"/>
+          </a:xfrm>
+          <a:prstGeom prst="rect">
+            <a:avLst/>
+          </a:prstGeom>
+        </p:spPr>
+        <p:txBody>
+          <a:bodyPr wrap="none">
+            <a:spAutoFit/>
+          </a:bodyPr>
+          <a:lstStyle/>
+          <a:p>
+            <a:r>
+              <a:rPr lang="ru-RU" dirty="0"/>
+              <a:t>Блок внутри метода</a:t>
+            </a:r>
+          </a:p>
+        </p:txBody>
+      </p:sp>
+      <p:pic>
+        <p:nvPicPr>
+          <p:cNvPr id="18437" name="Picture 5"/>
+          <p:cNvPicPr>
+            <a:picLocks noChangeAspect="1" noChangeArrowheads="1"/>
+          </p:cNvPicPr>
+          <p:nvPr/>
+        </p:nvPicPr>
+        <p:blipFill>
+          <a:blip r:embed="rId5"/>
+          <a:srcRect/>
+          <a:stretch>
+            <a:fillRect/>
+          </a:stretch>
+        </p:blipFill>
+        <p:spPr bwMode="auto">
+          <a:xfrm>
+            <a:off x="2047875" y="4869160"/>
+            <a:ext cx="5276850" cy="1419225"/>
+          </a:xfrm>
+          <a:prstGeom prst="rect">
+            <a:avLst/>
+          </a:prstGeom>
+          <a:noFill/>
+          <a:ln w="9525">
+            <a:noFill/>
+            <a:miter lim="800000"/>
+            <a:headEnd/>
+            <a:tailEnd/>
+          </a:ln>
+          <a:effectLst/>
+        </p:spPr>
+      </p:pic>
+      <p:sp>
+        <p:nvSpPr>
+          <p:cNvPr id="9" name="Прямоугольник 8"/>
+          <p:cNvSpPr/>
+          <p:nvPr/>
+        </p:nvSpPr>
+        <p:spPr>
+          <a:xfrm>
+            <a:off x="3401486" y="6288385"/>
+            <a:ext cx="2008883" cy="369332"/>
+          </a:xfrm>
+          <a:prstGeom prst="rect">
+            <a:avLst/>
+          </a:prstGeom>
+        </p:spPr>
+        <p:txBody>
+          <a:bodyPr wrap="none">
+            <a:spAutoFit/>
+          </a:bodyPr>
+          <a:lstStyle/>
+          <a:p>
+            <a:r>
+              <a:rPr lang="ru-RU" dirty="0"/>
+              <a:t>Перекрытие имён</a:t>
+            </a:r>
+          </a:p>
+        </p:txBody>
+      </p:sp>
+    </p:spTree>
+  </p:cSld>
+  <p:clrMapOvr>
+    <a:masterClrMapping/>
+  </p:clrMapOvr>
+</p:sld>
+</file>
+
+<file path=ppt/slides/slide19.xml><?xml version="1.0" encoding="utf-8"?>
+<p:sld xmlns:a="http://schemas.openxmlformats.org/drawingml/2006/main" xmlns:r="http://schemas.openxmlformats.org/officeDocument/2006/relationships" xmlns:p="http://schemas.openxmlformats.org/presentationml/2006/main">
+  <p:cSld>
+    <p:spTree>
+      <p:nvGrpSpPr>
+        <p:cNvPr id="1" name=""/>
+        <p:cNvGrpSpPr/>
+        <p:nvPr/>
+      </p:nvGrpSpPr>
+      <p:grpSpPr>
+        <a:xfrm>
+          <a:off x="0" y="0"/>
+          <a:ext cx="0" cy="0"/>
+          <a:chOff x="0" y="0"/>
+          <a:chExt cx="0" cy="0"/>
+        </a:xfrm>
+      </p:grpSpPr>
+      <p:sp>
+        <p:nvSpPr>
+          <p:cNvPr id="3" name="Прямоугольник 2"/>
+          <p:cNvSpPr/>
+          <p:nvPr/>
+        </p:nvSpPr>
+        <p:spPr>
+          <a:xfrm>
+            <a:off x="-3674" y="0"/>
+            <a:ext cx="9144000" cy="1754326"/>
+          </a:xfrm>
+          <a:prstGeom prst="rect">
+            <a:avLst/>
+          </a:prstGeom>
+        </p:spPr>
+        <p:txBody>
+          <a:bodyPr wrap="square">
+            <a:spAutoFit/>
+          </a:bodyPr>
+          <a:lstStyle/>
+          <a:p>
+            <a:pPr algn="just"/>
+            <a:r>
+              <a:rPr lang="ru-RU" dirty="0">
+                <a:latin typeface="Times New Roman" panose="02020603050405020304" pitchFamily="18" charset="0"/>
+                <a:cs typeface="Times New Roman" panose="02020603050405020304" pitchFamily="18" charset="0"/>
+              </a:rPr>
+              <a:t>Условные конструкции - один из базовых компонентов многих языков программирования, которые направляют работу программы по одному из путей в зависимости от определенных условий. Одной из таких конструкций в языке программирования C# является конструкция </a:t>
+            </a:r>
+            <a:r>
+              <a:rPr lang="ru-RU" dirty="0" err="1">
+                <a:latin typeface="Times New Roman" panose="02020603050405020304" pitchFamily="18" charset="0"/>
+                <a:cs typeface="Times New Roman" panose="02020603050405020304" pitchFamily="18" charset="0"/>
+              </a:rPr>
+              <a:t>if</a:t>
+            </a:r>
+            <a:r>
+              <a:rPr lang="ru-RU" dirty="0">
+                <a:latin typeface="Times New Roman" panose="02020603050405020304" pitchFamily="18" charset="0"/>
+                <a:cs typeface="Times New Roman" panose="02020603050405020304" pitchFamily="18" charset="0"/>
+              </a:rPr>
+              <a:t>..</a:t>
+            </a:r>
+            <a:r>
+              <a:rPr lang="ru-RU" dirty="0" err="1">
+                <a:latin typeface="Times New Roman" panose="02020603050405020304" pitchFamily="18" charset="0"/>
+                <a:cs typeface="Times New Roman" panose="02020603050405020304" pitchFamily="18" charset="0"/>
+              </a:rPr>
+              <a:t>else</a:t>
+            </a:r>
+            <a:endParaRPr lang="ru-RU" dirty="0">
+              <a:latin typeface="Times New Roman" panose="02020603050405020304" pitchFamily="18" charset="0"/>
+              <a:cs typeface="Times New Roman" panose="02020603050405020304" pitchFamily="18" charset="0"/>
+            </a:endParaRPr>
+          </a:p>
+          <a:p>
+            <a:pPr algn="just"/>
+            <a:r>
+              <a:rPr lang="ru-RU" dirty="0">
+                <a:latin typeface="Times New Roman" panose="02020603050405020304" pitchFamily="18" charset="0"/>
+                <a:cs typeface="Times New Roman" panose="02020603050405020304" pitchFamily="18" charset="0"/>
+              </a:rPr>
+              <a:t>Конструкция </a:t>
+            </a:r>
+            <a:r>
+              <a:rPr lang="ru-RU" dirty="0" err="1">
+                <a:latin typeface="Times New Roman" panose="02020603050405020304" pitchFamily="18" charset="0"/>
+                <a:cs typeface="Times New Roman" panose="02020603050405020304" pitchFamily="18" charset="0"/>
+              </a:rPr>
+              <a:t>if</a:t>
+            </a:r>
+            <a:r>
+              <a:rPr lang="ru-RU" dirty="0">
+                <a:latin typeface="Times New Roman" panose="02020603050405020304" pitchFamily="18" charset="0"/>
+                <a:cs typeface="Times New Roman" panose="02020603050405020304" pitchFamily="18" charset="0"/>
+              </a:rPr>
+              <a:t>/</a:t>
+            </a:r>
+            <a:r>
+              <a:rPr lang="ru-RU" dirty="0" err="1">
+                <a:latin typeface="Times New Roman" panose="02020603050405020304" pitchFamily="18" charset="0"/>
+                <a:cs typeface="Times New Roman" panose="02020603050405020304" pitchFamily="18" charset="0"/>
+              </a:rPr>
+              <a:t>else</a:t>
+            </a:r>
+            <a:r>
+              <a:rPr lang="ru-RU" dirty="0">
+                <a:latin typeface="Times New Roman" panose="02020603050405020304" pitchFamily="18" charset="0"/>
+                <a:cs typeface="Times New Roman" panose="02020603050405020304" pitchFamily="18" charset="0"/>
+              </a:rPr>
+              <a:t> проверяет истинность некоторого условия и в зависимости от результатов проверки выполняет определенный код.</a:t>
+            </a:r>
+          </a:p>
+        </p:txBody>
+      </p:sp>
+      <p:pic>
+        <p:nvPicPr>
+          <p:cNvPr id="4" name="Рисунок 3"/>
+          <p:cNvPicPr>
+            <a:picLocks noChangeAspect="1"/>
+          </p:cNvPicPr>
+          <p:nvPr/>
+        </p:nvPicPr>
+        <p:blipFill>
+          <a:blip r:embed="rId2"/>
+          <a:stretch>
+            <a:fillRect/>
+          </a:stretch>
+        </p:blipFill>
+        <p:spPr>
+          <a:xfrm>
+            <a:off x="0" y="1785926"/>
+            <a:ext cx="5158652" cy="3430283"/>
+          </a:xfrm>
+          <a:prstGeom prst="rect">
+            <a:avLst/>
+          </a:prstGeom>
+        </p:spPr>
+      </p:pic>
+      <p:pic>
+        <p:nvPicPr>
+          <p:cNvPr id="5" name="Рисунок 4"/>
+          <p:cNvPicPr>
+            <a:picLocks noChangeAspect="1"/>
+          </p:cNvPicPr>
+          <p:nvPr/>
+        </p:nvPicPr>
+        <p:blipFill>
+          <a:blip r:embed="rId3"/>
+          <a:stretch>
+            <a:fillRect/>
+          </a:stretch>
+        </p:blipFill>
+        <p:spPr>
+          <a:xfrm>
+            <a:off x="3115761" y="5194741"/>
+            <a:ext cx="2905125" cy="1304925"/>
+          </a:xfrm>
+          <a:prstGeom prst="rect">
+            <a:avLst/>
+          </a:prstGeom>
+        </p:spPr>
+      </p:pic>
+      <p:sp>
+        <p:nvSpPr>
+          <p:cNvPr id="6" name="Прямоугольник 5"/>
+          <p:cNvSpPr/>
+          <p:nvPr/>
+        </p:nvSpPr>
+        <p:spPr>
+          <a:xfrm>
+            <a:off x="3764321" y="6488668"/>
+            <a:ext cx="1608004" cy="369332"/>
+          </a:xfrm>
+          <a:prstGeom prst="rect">
+            <a:avLst/>
+          </a:prstGeom>
+        </p:spPr>
+        <p:txBody>
+          <a:bodyPr wrap="none">
+            <a:spAutoFit/>
+          </a:bodyPr>
+          <a:lstStyle/>
+          <a:p>
+            <a:r>
+              <a:rPr lang="ru-RU" b="1" dirty="0" smtClean="0"/>
+              <a:t>Чему равно </a:t>
+            </a:r>
+            <a:r>
+              <a:rPr lang="en-US" b="1" dirty="0" smtClean="0"/>
+              <a:t>z</a:t>
+            </a:r>
+            <a:r>
+              <a:rPr lang="ru-RU" b="1" dirty="0" smtClean="0"/>
+              <a:t>?</a:t>
+            </a:r>
+            <a:endParaRPr lang="ru-RU" b="1" dirty="0"/>
+          </a:p>
+        </p:txBody>
+      </p:sp>
+      <p:pic>
+        <p:nvPicPr>
+          <p:cNvPr id="8193" name="Picture 1"/>
+          <p:cNvPicPr>
+            <a:picLocks noChangeAspect="1" noChangeArrowheads="1"/>
+          </p:cNvPicPr>
+          <p:nvPr/>
+        </p:nvPicPr>
+        <p:blipFill>
+          <a:blip r:embed="rId4"/>
+          <a:srcRect/>
+          <a:stretch>
+            <a:fillRect/>
+          </a:stretch>
+        </p:blipFill>
+        <p:spPr bwMode="auto">
+          <a:xfrm>
+            <a:off x="5214942" y="2000240"/>
+            <a:ext cx="3929057" cy="3038475"/>
+          </a:xfrm>
+          <a:prstGeom prst="rect">
+            <a:avLst/>
+          </a:prstGeom>
+          <a:noFill/>
+          <a:ln w="9525">
+            <a:noFill/>
+            <a:miter lim="800000"/>
+            <a:headEnd/>
+            <a:tailEnd/>
+          </a:ln>
+          <a:effectLst/>
+        </p:spPr>
+      </p:pic>
+    </p:spTree>
+    <p:extLst>
+      <p:ext uri="{BB962C8B-B14F-4D97-AF65-F5344CB8AC3E}">
+        <p14:creationId xmlns:p14="http://schemas.microsoft.com/office/powerpoint/2010/main" xmlns="" val="115848474"/>
+      </p:ext>
+    </p:extLst>
   </p:cSld>
   <p:clrMapOvr>
     <a:masterClrMapping/>
@@ -3494,6 +5994,1681 @@
 </p:sld>
 </file>
 
+<file path=ppt/slides/slide20.xml><?xml version="1.0" encoding="utf-8"?>
+<p:sld xmlns:a="http://schemas.openxmlformats.org/drawingml/2006/main" xmlns:r="http://schemas.openxmlformats.org/officeDocument/2006/relationships" xmlns:p="http://schemas.openxmlformats.org/presentationml/2006/main">
+  <p:cSld>
+    <p:spTree>
+      <p:nvGrpSpPr>
+        <p:cNvPr id="1" name=""/>
+        <p:cNvGrpSpPr/>
+        <p:nvPr/>
+      </p:nvGrpSpPr>
+      <p:grpSpPr>
+        <a:xfrm>
+          <a:off x="0" y="0"/>
+          <a:ext cx="0" cy="0"/>
+          <a:chOff x="0" y="0"/>
+          <a:chExt cx="0" cy="0"/>
+        </a:xfrm>
+      </p:grpSpPr>
+      <p:sp>
+        <p:nvSpPr>
+          <p:cNvPr id="4" name="Прямоугольник 3"/>
+          <p:cNvSpPr/>
+          <p:nvPr/>
+        </p:nvSpPr>
+        <p:spPr>
+          <a:xfrm>
+            <a:off x="0" y="-2250"/>
+            <a:ext cx="9144000" cy="2308324"/>
+          </a:xfrm>
+          <a:prstGeom prst="rect">
+            <a:avLst/>
+          </a:prstGeom>
+        </p:spPr>
+        <p:txBody>
+          <a:bodyPr wrap="square">
+            <a:spAutoFit/>
+          </a:bodyPr>
+          <a:lstStyle/>
+          <a:p>
+            <a:pPr algn="just"/>
+            <a:r>
+              <a:rPr lang="ru-RU" dirty="0" err="1">
+                <a:latin typeface="Times New Roman" panose="02020603050405020304" pitchFamily="18" charset="0"/>
+                <a:cs typeface="Times New Roman" panose="02020603050405020304" pitchFamily="18" charset="0"/>
+              </a:rPr>
+              <a:t>Pattern</a:t>
+            </a:r>
+            <a:r>
+              <a:rPr lang="ru-RU" dirty="0">
+                <a:latin typeface="Times New Roman" panose="02020603050405020304" pitchFamily="18" charset="0"/>
+                <a:cs typeface="Times New Roman" panose="02020603050405020304" pitchFamily="18" charset="0"/>
+              </a:rPr>
+              <a:t> </a:t>
+            </a:r>
+            <a:r>
+              <a:rPr lang="ru-RU" dirty="0" err="1">
+                <a:latin typeface="Times New Roman" panose="02020603050405020304" pitchFamily="18" charset="0"/>
+                <a:cs typeface="Times New Roman" panose="02020603050405020304" pitchFamily="18" charset="0"/>
+              </a:rPr>
+              <a:t>matching</a:t>
+            </a:r>
+            <a:r>
+              <a:rPr lang="ru-RU" dirty="0">
+                <a:latin typeface="Times New Roman" panose="02020603050405020304" pitchFamily="18" charset="0"/>
+                <a:cs typeface="Times New Roman" panose="02020603050405020304" pitchFamily="18" charset="0"/>
+              </a:rPr>
+              <a:t> (сопоставление с образцом) — это способ проверять не просто значения, а структуру и свойства данных. В контексте </a:t>
+            </a:r>
+            <a:r>
+              <a:rPr lang="ru-RU" dirty="0" err="1">
+                <a:latin typeface="Times New Roman" panose="02020603050405020304" pitchFamily="18" charset="0"/>
+                <a:cs typeface="Times New Roman" panose="02020603050405020304" pitchFamily="18" charset="0"/>
+              </a:rPr>
+              <a:t>switch</a:t>
+            </a:r>
+            <a:r>
+              <a:rPr lang="ru-RU" dirty="0">
+                <a:latin typeface="Times New Roman" panose="02020603050405020304" pitchFamily="18" charset="0"/>
+                <a:cs typeface="Times New Roman" panose="02020603050405020304" pitchFamily="18" charset="0"/>
+              </a:rPr>
+              <a:t> — это расширенная версия привычного оператора </a:t>
+            </a:r>
+            <a:r>
+              <a:rPr lang="ru-RU" dirty="0" err="1">
+                <a:latin typeface="Times New Roman" panose="02020603050405020304" pitchFamily="18" charset="0"/>
+                <a:cs typeface="Times New Roman" panose="02020603050405020304" pitchFamily="18" charset="0"/>
+              </a:rPr>
+              <a:t>switch</a:t>
+            </a:r>
+            <a:r>
+              <a:rPr lang="ru-RU" dirty="0">
+                <a:latin typeface="Times New Roman" panose="02020603050405020304" pitchFamily="18" charset="0"/>
+                <a:cs typeface="Times New Roman" panose="02020603050405020304" pitchFamily="18" charset="0"/>
+              </a:rPr>
+              <a:t>, которая умеет:</a:t>
+            </a:r>
+          </a:p>
+          <a:p>
+            <a:pPr algn="just"/>
+            <a:r>
+              <a:rPr lang="ru-RU" dirty="0">
+                <a:latin typeface="Times New Roman" panose="02020603050405020304" pitchFamily="18" charset="0"/>
+                <a:cs typeface="Times New Roman" panose="02020603050405020304" pitchFamily="18" charset="0"/>
+              </a:rPr>
+              <a:t>    проверять тип объекта;</a:t>
+            </a:r>
+          </a:p>
+          <a:p>
+            <a:pPr algn="just"/>
+            <a:r>
+              <a:rPr lang="ru-RU" dirty="0">
+                <a:latin typeface="Times New Roman" panose="02020603050405020304" pitchFamily="18" charset="0"/>
+                <a:cs typeface="Times New Roman" panose="02020603050405020304" pitchFamily="18" charset="0"/>
+              </a:rPr>
+              <a:t>    извлекать из него данные;</a:t>
+            </a:r>
+          </a:p>
+          <a:p>
+            <a:pPr algn="just"/>
+            <a:r>
+              <a:rPr lang="ru-RU" dirty="0">
+                <a:latin typeface="Times New Roman" panose="02020603050405020304" pitchFamily="18" charset="0"/>
+                <a:cs typeface="Times New Roman" panose="02020603050405020304" pitchFamily="18" charset="0"/>
+              </a:rPr>
+              <a:t>    проверять значения </a:t>
+            </a:r>
+            <a:r>
+              <a:rPr lang="ru-RU" dirty="0" smtClean="0">
+                <a:latin typeface="Times New Roman" panose="02020603050405020304" pitchFamily="18" charset="0"/>
+                <a:cs typeface="Times New Roman" panose="02020603050405020304" pitchFamily="18" charset="0"/>
+              </a:rPr>
+              <a:t>свойств</a:t>
+            </a:r>
+          </a:p>
+          <a:p>
+            <a:pPr algn="just"/>
+            <a:r>
+              <a:rPr lang="ru-RU" dirty="0" smtClean="0">
+                <a:latin typeface="Times New Roman" panose="02020603050405020304" pitchFamily="18" charset="0"/>
+                <a:cs typeface="Times New Roman" panose="02020603050405020304" pitchFamily="18" charset="0"/>
+              </a:rPr>
+              <a:t>Проще </a:t>
+            </a:r>
+            <a:r>
+              <a:rPr lang="ru-RU" dirty="0">
+                <a:latin typeface="Times New Roman" panose="02020603050405020304" pitchFamily="18" charset="0"/>
+                <a:cs typeface="Times New Roman" panose="02020603050405020304" pitchFamily="18" charset="0"/>
+              </a:rPr>
+              <a:t>говоря, это как «умный переключатель», который понимает не только «если равно 5», но и «если это строка длиной больше </a:t>
+            </a:r>
+            <a:r>
+              <a:rPr lang="ru-RU" dirty="0" smtClean="0">
+                <a:latin typeface="Times New Roman" panose="02020603050405020304" pitchFamily="18" charset="0"/>
+                <a:cs typeface="Times New Roman" panose="02020603050405020304" pitchFamily="18" charset="0"/>
+              </a:rPr>
+              <a:t>10».</a:t>
+            </a:r>
+            <a:endParaRPr lang="ru-RU" dirty="0">
+              <a:latin typeface="Times New Roman" panose="02020603050405020304" pitchFamily="18" charset="0"/>
+              <a:cs typeface="Times New Roman" panose="02020603050405020304" pitchFamily="18" charset="0"/>
+            </a:endParaRPr>
+          </a:p>
+        </p:txBody>
+      </p:sp>
+      <p:pic>
+        <p:nvPicPr>
+          <p:cNvPr id="7" name="Рисунок 6"/>
+          <p:cNvPicPr>
+            <a:picLocks noChangeAspect="1"/>
+          </p:cNvPicPr>
+          <p:nvPr/>
+        </p:nvPicPr>
+        <p:blipFill>
+          <a:blip r:embed="rId2"/>
+          <a:stretch>
+            <a:fillRect/>
+          </a:stretch>
+        </p:blipFill>
+        <p:spPr>
+          <a:xfrm>
+            <a:off x="714348" y="2357430"/>
+            <a:ext cx="3119292" cy="2362073"/>
+          </a:xfrm>
+          <a:prstGeom prst="rect">
+            <a:avLst/>
+          </a:prstGeom>
+        </p:spPr>
+      </p:pic>
+      <p:sp>
+        <p:nvSpPr>
+          <p:cNvPr id="8" name="Прямоугольник 7"/>
+          <p:cNvSpPr/>
+          <p:nvPr/>
+        </p:nvSpPr>
+        <p:spPr>
+          <a:xfrm>
+            <a:off x="4572000" y="2357430"/>
+            <a:ext cx="4572000" cy="2308324"/>
+          </a:xfrm>
+          <a:prstGeom prst="rect">
+            <a:avLst/>
+          </a:prstGeom>
+        </p:spPr>
+        <p:txBody>
+          <a:bodyPr>
+            <a:spAutoFit/>
+          </a:bodyPr>
+          <a:lstStyle/>
+          <a:p>
+            <a:pPr algn="just"/>
+            <a:r>
+              <a:rPr lang="ru-RU" dirty="0" err="1">
+                <a:latin typeface="Times New Roman" panose="02020603050405020304" pitchFamily="18" charset="0"/>
+                <a:cs typeface="Times New Roman" panose="02020603050405020304" pitchFamily="18" charset="0"/>
+              </a:rPr>
+              <a:t>Pattern</a:t>
+            </a:r>
+            <a:r>
+              <a:rPr lang="ru-RU" dirty="0">
+                <a:latin typeface="Times New Roman" panose="02020603050405020304" pitchFamily="18" charset="0"/>
+                <a:cs typeface="Times New Roman" panose="02020603050405020304" pitchFamily="18" charset="0"/>
+              </a:rPr>
+              <a:t> </a:t>
+            </a:r>
+            <a:r>
+              <a:rPr lang="ru-RU" dirty="0" err="1">
+                <a:latin typeface="Times New Roman" panose="02020603050405020304" pitchFamily="18" charset="0"/>
+                <a:cs typeface="Times New Roman" panose="02020603050405020304" pitchFamily="18" charset="0"/>
+              </a:rPr>
+              <a:t>matching</a:t>
+            </a:r>
+            <a:r>
+              <a:rPr lang="ru-RU" dirty="0">
+                <a:latin typeface="Times New Roman" panose="02020603050405020304" pitchFamily="18" charset="0"/>
+                <a:cs typeface="Times New Roman" panose="02020603050405020304" pitchFamily="18" charset="0"/>
+              </a:rPr>
+              <a:t> в </a:t>
+            </a:r>
+            <a:r>
+              <a:rPr lang="ru-RU" dirty="0" err="1">
+                <a:latin typeface="Times New Roman" panose="02020603050405020304" pitchFamily="18" charset="0"/>
+                <a:cs typeface="Times New Roman" panose="02020603050405020304" pitchFamily="18" charset="0"/>
+              </a:rPr>
+              <a:t>switch</a:t>
+            </a:r>
+            <a:r>
+              <a:rPr lang="ru-RU" dirty="0">
+                <a:latin typeface="Times New Roman" panose="02020603050405020304" pitchFamily="18" charset="0"/>
+                <a:cs typeface="Times New Roman" panose="02020603050405020304" pitchFamily="18" charset="0"/>
+              </a:rPr>
+              <a:t> делает код:</a:t>
+            </a:r>
+          </a:p>
+          <a:p>
+            <a:pPr algn="just"/>
+            <a:r>
+              <a:rPr lang="ru-RU" dirty="0">
+                <a:latin typeface="Times New Roman" panose="02020603050405020304" pitchFamily="18" charset="0"/>
+                <a:cs typeface="Times New Roman" panose="02020603050405020304" pitchFamily="18" charset="0"/>
+              </a:rPr>
+              <a:t>    короче — заменяет длинные цепочки </a:t>
+            </a:r>
+            <a:r>
+              <a:rPr lang="ru-RU" dirty="0" err="1">
+                <a:latin typeface="Times New Roman" panose="02020603050405020304" pitchFamily="18" charset="0"/>
+                <a:cs typeface="Times New Roman" panose="02020603050405020304" pitchFamily="18" charset="0"/>
+              </a:rPr>
+              <a:t>if‑else</a:t>
+            </a:r>
+            <a:r>
+              <a:rPr lang="ru-RU" dirty="0">
+                <a:latin typeface="Times New Roman" panose="02020603050405020304" pitchFamily="18" charset="0"/>
+                <a:cs typeface="Times New Roman" panose="02020603050405020304" pitchFamily="18" charset="0"/>
+              </a:rPr>
+              <a:t>;</a:t>
+            </a:r>
+          </a:p>
+          <a:p>
+            <a:pPr algn="just"/>
+            <a:r>
+              <a:rPr lang="ru-RU" dirty="0">
+                <a:latin typeface="Times New Roman" panose="02020603050405020304" pitchFamily="18" charset="0"/>
+                <a:cs typeface="Times New Roman" panose="02020603050405020304" pitchFamily="18" charset="0"/>
+              </a:rPr>
+              <a:t>    </a:t>
+            </a:r>
+            <a:r>
+              <a:rPr lang="ru-RU" dirty="0" err="1">
+                <a:latin typeface="Times New Roman" panose="02020603050405020304" pitchFamily="18" charset="0"/>
+                <a:cs typeface="Times New Roman" panose="02020603050405020304" pitchFamily="18" charset="0"/>
+              </a:rPr>
+              <a:t>читаемее</a:t>
+            </a:r>
+            <a:r>
+              <a:rPr lang="ru-RU" dirty="0">
+                <a:latin typeface="Times New Roman" panose="02020603050405020304" pitchFamily="18" charset="0"/>
+                <a:cs typeface="Times New Roman" panose="02020603050405020304" pitchFamily="18" charset="0"/>
+              </a:rPr>
+              <a:t> — логика видна сразу;</a:t>
+            </a:r>
+          </a:p>
+          <a:p>
+            <a:pPr algn="just"/>
+            <a:r>
+              <a:rPr lang="ru-RU" dirty="0">
+                <a:latin typeface="Times New Roman" panose="02020603050405020304" pitchFamily="18" charset="0"/>
+                <a:cs typeface="Times New Roman" panose="02020603050405020304" pitchFamily="18" charset="0"/>
+              </a:rPr>
+              <a:t>    безопаснее — меньше проверок на </a:t>
+            </a:r>
+            <a:r>
+              <a:rPr lang="ru-RU" dirty="0" err="1">
+                <a:latin typeface="Times New Roman" panose="02020603050405020304" pitchFamily="18" charset="0"/>
+                <a:cs typeface="Times New Roman" panose="02020603050405020304" pitchFamily="18" charset="0"/>
+              </a:rPr>
+              <a:t>null</a:t>
+            </a:r>
+            <a:r>
+              <a:rPr lang="ru-RU" dirty="0">
+                <a:latin typeface="Times New Roman" panose="02020603050405020304" pitchFamily="18" charset="0"/>
+                <a:cs typeface="Times New Roman" panose="02020603050405020304" pitchFamily="18" charset="0"/>
+              </a:rPr>
+              <a:t> и приведение типов;</a:t>
+            </a:r>
+          </a:p>
+          <a:p>
+            <a:pPr algn="just"/>
+            <a:r>
+              <a:rPr lang="ru-RU" dirty="0">
+                <a:latin typeface="Times New Roman" panose="02020603050405020304" pitchFamily="18" charset="0"/>
+                <a:cs typeface="Times New Roman" panose="02020603050405020304" pitchFamily="18" charset="0"/>
+              </a:rPr>
+              <a:t>    гибче — можно проверять сложные условия в одной строке.</a:t>
+            </a:r>
+          </a:p>
+        </p:txBody>
+      </p:sp>
+      <p:pic>
+        <p:nvPicPr>
+          <p:cNvPr id="5" name="Picture 2"/>
+          <p:cNvPicPr>
+            <a:picLocks noChangeAspect="1" noChangeArrowheads="1"/>
+          </p:cNvPicPr>
+          <p:nvPr/>
+        </p:nvPicPr>
+        <p:blipFill>
+          <a:blip r:embed="rId3"/>
+          <a:srcRect/>
+          <a:stretch>
+            <a:fillRect/>
+          </a:stretch>
+        </p:blipFill>
+        <p:spPr bwMode="auto">
+          <a:xfrm>
+            <a:off x="285720" y="4786323"/>
+            <a:ext cx="8582025" cy="1571636"/>
+          </a:xfrm>
+          <a:prstGeom prst="rect">
+            <a:avLst/>
+          </a:prstGeom>
+          <a:noFill/>
+          <a:ln w="9525">
+            <a:noFill/>
+            <a:miter lim="800000"/>
+            <a:headEnd/>
+            <a:tailEnd/>
+          </a:ln>
+          <a:effectLst/>
+        </p:spPr>
+      </p:pic>
+      <p:sp>
+        <p:nvSpPr>
+          <p:cNvPr id="6" name="Прямоугольник 5"/>
+          <p:cNvSpPr/>
+          <p:nvPr/>
+        </p:nvSpPr>
+        <p:spPr>
+          <a:xfrm>
+            <a:off x="0" y="6211669"/>
+            <a:ext cx="9144000" cy="646331"/>
+          </a:xfrm>
+          <a:prstGeom prst="rect">
+            <a:avLst/>
+          </a:prstGeom>
+        </p:spPr>
+        <p:txBody>
+          <a:bodyPr wrap="square">
+            <a:spAutoFit/>
+          </a:bodyPr>
+          <a:lstStyle/>
+          <a:p>
+            <a:pPr algn="just"/>
+            <a:r>
+              <a:rPr lang="ru-RU" dirty="0" smtClean="0">
+                <a:latin typeface="Times New Roman" pitchFamily="18" charset="0"/>
+                <a:cs typeface="Times New Roman" pitchFamily="18" charset="0"/>
+              </a:rPr>
+              <a:t>В операторе </a:t>
+            </a:r>
+            <a:r>
+              <a:rPr lang="ru-RU" dirty="0" err="1" smtClean="0">
+                <a:latin typeface="Times New Roman" pitchFamily="18" charset="0"/>
+                <a:cs typeface="Times New Roman" pitchFamily="18" charset="0"/>
+              </a:rPr>
+              <a:t>if</a:t>
+            </a:r>
+            <a:r>
+              <a:rPr lang="ru-RU" dirty="0" smtClean="0">
+                <a:latin typeface="Times New Roman" pitchFamily="18" charset="0"/>
+                <a:cs typeface="Times New Roman" pitchFamily="18" charset="0"/>
+              </a:rPr>
+              <a:t> из возможностей </a:t>
+            </a:r>
+            <a:r>
+              <a:rPr lang="ru-RU" dirty="0" err="1" smtClean="0">
+                <a:latin typeface="Times New Roman" pitchFamily="18" charset="0"/>
+                <a:cs typeface="Times New Roman" pitchFamily="18" charset="0"/>
+              </a:rPr>
+              <a:t>pattern</a:t>
+            </a:r>
+            <a:r>
+              <a:rPr lang="ru-RU" dirty="0" smtClean="0">
+                <a:latin typeface="Times New Roman" pitchFamily="18" charset="0"/>
+                <a:cs typeface="Times New Roman" pitchFamily="18" charset="0"/>
+              </a:rPr>
+              <a:t> </a:t>
+            </a:r>
+            <a:r>
+              <a:rPr lang="ru-RU" dirty="0" err="1" smtClean="0">
+                <a:latin typeface="Times New Roman" pitchFamily="18" charset="0"/>
+                <a:cs typeface="Times New Roman" pitchFamily="18" charset="0"/>
+              </a:rPr>
+              <a:t>matching'а</a:t>
+            </a:r>
+            <a:r>
+              <a:rPr lang="ru-RU" dirty="0" smtClean="0">
+                <a:latin typeface="Times New Roman" pitchFamily="18" charset="0"/>
+                <a:cs typeface="Times New Roman" pitchFamily="18" charset="0"/>
+              </a:rPr>
+              <a:t> чаще всего применяются is-выражения (выражения, с оператором </a:t>
+            </a:r>
+            <a:r>
+              <a:rPr lang="ru-RU" dirty="0" err="1" smtClean="0">
+                <a:latin typeface="Times New Roman" pitchFamily="18" charset="0"/>
+                <a:cs typeface="Times New Roman" pitchFamily="18" charset="0"/>
+              </a:rPr>
+              <a:t>is</a:t>
+            </a:r>
+            <a:r>
+              <a:rPr lang="ru-RU" dirty="0" smtClean="0">
+                <a:latin typeface="Times New Roman" pitchFamily="18" charset="0"/>
+                <a:cs typeface="Times New Roman" pitchFamily="18" charset="0"/>
+              </a:rPr>
+              <a:t>).</a:t>
+            </a:r>
+            <a:endParaRPr lang="ru-RU" dirty="0">
+              <a:latin typeface="Times New Roman" pitchFamily="18" charset="0"/>
+              <a:cs typeface="Times New Roman" pitchFamily="18" charset="0"/>
+            </a:endParaRPr>
+          </a:p>
+        </p:txBody>
+      </p:sp>
+    </p:spTree>
+    <p:extLst>
+      <p:ext uri="{BB962C8B-B14F-4D97-AF65-F5344CB8AC3E}">
+        <p14:creationId xmlns:p14="http://schemas.microsoft.com/office/powerpoint/2010/main" xmlns="" val="9482386"/>
+      </p:ext>
+    </p:extLst>
+  </p:cSld>
+  <p:clrMapOvr>
+    <a:masterClrMapping/>
+  </p:clrMapOvr>
+</p:sld>
+</file>
+
+<file path=ppt/slides/slide21.xml><?xml version="1.0" encoding="utf-8"?>
+<p:sld xmlns:a="http://schemas.openxmlformats.org/drawingml/2006/main" xmlns:r="http://schemas.openxmlformats.org/officeDocument/2006/relationships" xmlns:p="http://schemas.openxmlformats.org/presentationml/2006/main">
+  <p:cSld>
+    <p:spTree>
+      <p:nvGrpSpPr>
+        <p:cNvPr id="1" name=""/>
+        <p:cNvGrpSpPr/>
+        <p:nvPr/>
+      </p:nvGrpSpPr>
+      <p:grpSpPr>
+        <a:xfrm>
+          <a:off x="0" y="0"/>
+          <a:ext cx="0" cy="0"/>
+          <a:chOff x="0" y="0"/>
+          <a:chExt cx="0" cy="0"/>
+        </a:xfrm>
+      </p:grpSpPr>
+      <p:pic>
+        <p:nvPicPr>
+          <p:cNvPr id="3" name="Рисунок 2"/>
+          <p:cNvPicPr>
+            <a:picLocks noChangeAspect="1"/>
+          </p:cNvPicPr>
+          <p:nvPr/>
+        </p:nvPicPr>
+        <p:blipFill>
+          <a:blip r:embed="rId2"/>
+          <a:stretch>
+            <a:fillRect/>
+          </a:stretch>
+        </p:blipFill>
+        <p:spPr>
+          <a:xfrm>
+            <a:off x="179512" y="260648"/>
+            <a:ext cx="4572000" cy="1323975"/>
+          </a:xfrm>
+          <a:prstGeom prst="rect">
+            <a:avLst/>
+          </a:prstGeom>
+        </p:spPr>
+      </p:pic>
+      <p:pic>
+        <p:nvPicPr>
+          <p:cNvPr id="4" name="Рисунок 3"/>
+          <p:cNvPicPr>
+            <a:picLocks noChangeAspect="1"/>
+          </p:cNvPicPr>
+          <p:nvPr/>
+        </p:nvPicPr>
+        <p:blipFill>
+          <a:blip r:embed="rId3"/>
+          <a:stretch>
+            <a:fillRect/>
+          </a:stretch>
+        </p:blipFill>
+        <p:spPr>
+          <a:xfrm>
+            <a:off x="6084168" y="260648"/>
+            <a:ext cx="2447925" cy="1857375"/>
+          </a:xfrm>
+          <a:prstGeom prst="rect">
+            <a:avLst/>
+          </a:prstGeom>
+        </p:spPr>
+      </p:pic>
+      <p:pic>
+        <p:nvPicPr>
+          <p:cNvPr id="5" name="Рисунок 4"/>
+          <p:cNvPicPr>
+            <a:picLocks noChangeAspect="1"/>
+          </p:cNvPicPr>
+          <p:nvPr/>
+        </p:nvPicPr>
+        <p:blipFill>
+          <a:blip r:embed="rId4"/>
+          <a:stretch>
+            <a:fillRect/>
+          </a:stretch>
+        </p:blipFill>
+        <p:spPr>
+          <a:xfrm>
+            <a:off x="169224" y="2060847"/>
+            <a:ext cx="3394664" cy="2405667"/>
+          </a:xfrm>
+          <a:prstGeom prst="rect">
+            <a:avLst/>
+          </a:prstGeom>
+        </p:spPr>
+      </p:pic>
+      <p:pic>
+        <p:nvPicPr>
+          <p:cNvPr id="6" name="Рисунок 5"/>
+          <p:cNvPicPr>
+            <a:picLocks noChangeAspect="1"/>
+          </p:cNvPicPr>
+          <p:nvPr/>
+        </p:nvPicPr>
+        <p:blipFill>
+          <a:blip r:embed="rId5"/>
+          <a:stretch>
+            <a:fillRect/>
+          </a:stretch>
+        </p:blipFill>
+        <p:spPr>
+          <a:xfrm>
+            <a:off x="4499992" y="2726432"/>
+            <a:ext cx="3653595" cy="1584176"/>
+          </a:xfrm>
+          <a:prstGeom prst="rect">
+            <a:avLst/>
+          </a:prstGeom>
+        </p:spPr>
+      </p:pic>
+      <p:sp>
+        <p:nvSpPr>
+          <p:cNvPr id="7" name="Прямоугольник 6"/>
+          <p:cNvSpPr/>
+          <p:nvPr/>
+        </p:nvSpPr>
+        <p:spPr>
+          <a:xfrm>
+            <a:off x="4211960" y="4365104"/>
+            <a:ext cx="4572000" cy="1200329"/>
+          </a:xfrm>
+          <a:prstGeom prst="rect">
+            <a:avLst/>
+          </a:prstGeom>
+        </p:spPr>
+        <p:txBody>
+          <a:bodyPr>
+            <a:spAutoFit/>
+          </a:bodyPr>
+          <a:lstStyle/>
+          <a:p>
+            <a:pPr algn="just"/>
+            <a:r>
+              <a:rPr lang="ru-RU" dirty="0">
+                <a:latin typeface="Times New Roman" pitchFamily="18" charset="0"/>
+                <a:cs typeface="Times New Roman" pitchFamily="18" charset="0"/>
+              </a:rPr>
+              <a:t>Стоит отметить, что переменная, которая определяется в объявлении цикла, должна по типу соответствовать типу элементов перебираемой коллекции.</a:t>
+            </a:r>
+          </a:p>
+        </p:txBody>
+      </p:sp>
+      <p:pic>
+        <p:nvPicPr>
+          <p:cNvPr id="8" name="Рисунок 7"/>
+          <p:cNvPicPr>
+            <a:picLocks noChangeAspect="1"/>
+          </p:cNvPicPr>
+          <p:nvPr/>
+        </p:nvPicPr>
+        <p:blipFill>
+          <a:blip r:embed="rId6"/>
+          <a:stretch>
+            <a:fillRect/>
+          </a:stretch>
+        </p:blipFill>
+        <p:spPr>
+          <a:xfrm>
+            <a:off x="169224" y="4781550"/>
+            <a:ext cx="3476625" cy="2076450"/>
+          </a:xfrm>
+          <a:prstGeom prst="rect">
+            <a:avLst/>
+          </a:prstGeom>
+        </p:spPr>
+      </p:pic>
+      <p:sp>
+        <p:nvSpPr>
+          <p:cNvPr id="9" name="Прямоугольник 8"/>
+          <p:cNvSpPr/>
+          <p:nvPr/>
+        </p:nvSpPr>
+        <p:spPr>
+          <a:xfrm>
+            <a:off x="3660576" y="6143644"/>
+            <a:ext cx="5483424" cy="461665"/>
+          </a:xfrm>
+          <a:prstGeom prst="rect">
+            <a:avLst/>
+          </a:prstGeom>
+          <a:solidFill>
+            <a:schemeClr val="accent3">
+              <a:lumMod val="20000"/>
+              <a:lumOff val="80000"/>
+            </a:schemeClr>
+          </a:solidFill>
+        </p:spPr>
+        <p:txBody>
+          <a:bodyPr wrap="none">
+            <a:spAutoFit/>
+          </a:bodyPr>
+          <a:lstStyle/>
+          <a:p>
+            <a:pPr algn="just"/>
+            <a:r>
+              <a:rPr lang="ru-RU" sz="2400" b="1" dirty="0" smtClean="0">
+                <a:latin typeface="Times New Roman" pitchFamily="18" charset="0"/>
+                <a:cs typeface="Times New Roman" pitchFamily="18" charset="0"/>
+              </a:rPr>
+              <a:t>Что делает оператор </a:t>
+            </a:r>
+            <a:r>
+              <a:rPr lang="en-US" sz="2400" b="1" dirty="0" smtClean="0">
+                <a:latin typeface="Times New Roman" pitchFamily="18" charset="0"/>
+                <a:cs typeface="Times New Roman" pitchFamily="18" charset="0"/>
+              </a:rPr>
+              <a:t>break </a:t>
+            </a:r>
+            <a:r>
+              <a:rPr lang="ru-RU" sz="2400" b="1" dirty="0" smtClean="0">
+                <a:latin typeface="Times New Roman" pitchFamily="18" charset="0"/>
+                <a:cs typeface="Times New Roman" pitchFamily="18" charset="0"/>
+              </a:rPr>
+              <a:t>и </a:t>
+            </a:r>
+            <a:r>
+              <a:rPr lang="en-US" sz="2400" b="1" dirty="0" smtClean="0">
+                <a:latin typeface="Times New Roman" pitchFamily="18" charset="0"/>
+                <a:cs typeface="Times New Roman" pitchFamily="18" charset="0"/>
+              </a:rPr>
+              <a:t>continue</a:t>
+            </a:r>
+            <a:r>
+              <a:rPr lang="ru-RU" sz="2400" b="1" dirty="0" smtClean="0">
+                <a:latin typeface="Times New Roman" pitchFamily="18" charset="0"/>
+                <a:cs typeface="Times New Roman" pitchFamily="18" charset="0"/>
+              </a:rPr>
+              <a:t>?</a:t>
+            </a:r>
+            <a:endParaRPr lang="ru-RU" sz="2400" b="1" dirty="0">
+              <a:latin typeface="Times New Roman" pitchFamily="18" charset="0"/>
+              <a:cs typeface="Times New Roman" pitchFamily="18" charset="0"/>
+            </a:endParaRPr>
+          </a:p>
+        </p:txBody>
+      </p:sp>
+    </p:spTree>
+    <p:extLst>
+      <p:ext uri="{BB962C8B-B14F-4D97-AF65-F5344CB8AC3E}">
+        <p14:creationId xmlns:p14="http://schemas.microsoft.com/office/powerpoint/2010/main" xmlns="" val="964502395"/>
+      </p:ext>
+    </p:extLst>
+  </p:cSld>
+  <p:clrMapOvr>
+    <a:masterClrMapping/>
+  </p:clrMapOvr>
+</p:sld>
+</file>
+
+<file path=ppt/slides/slide22.xml><?xml version="1.0" encoding="utf-8"?>
+<p:sld xmlns:a="http://schemas.openxmlformats.org/drawingml/2006/main" xmlns:r="http://schemas.openxmlformats.org/officeDocument/2006/relationships" xmlns:p="http://schemas.openxmlformats.org/presentationml/2006/main">
+  <p:cSld>
+    <p:spTree>
+      <p:nvGrpSpPr>
+        <p:cNvPr id="1" name=""/>
+        <p:cNvGrpSpPr/>
+        <p:nvPr/>
+      </p:nvGrpSpPr>
+      <p:grpSpPr>
+        <a:xfrm>
+          <a:off x="0" y="0"/>
+          <a:ext cx="0" cy="0"/>
+          <a:chOff x="0" y="0"/>
+          <a:chExt cx="0" cy="0"/>
+        </a:xfrm>
+      </p:grpSpPr>
+      <p:sp>
+        <p:nvSpPr>
+          <p:cNvPr id="2" name="Прямоугольник 1"/>
+          <p:cNvSpPr/>
+          <p:nvPr/>
+        </p:nvSpPr>
+        <p:spPr>
+          <a:xfrm>
+            <a:off x="0" y="1168679"/>
+            <a:ext cx="9144000" cy="1938992"/>
+          </a:xfrm>
+          <a:prstGeom prst="rect">
+            <a:avLst/>
+          </a:prstGeom>
+        </p:spPr>
+        <p:txBody>
+          <a:bodyPr wrap="square">
+            <a:spAutoFit/>
+          </a:bodyPr>
+          <a:lstStyle/>
+          <a:p>
+            <a:pPr algn="just"/>
+            <a:r>
+              <a:rPr lang="ru-RU" sz="2400" dirty="0" smtClean="0">
+                <a:latin typeface="Times New Roman" pitchFamily="18" charset="0"/>
+                <a:cs typeface="Times New Roman" pitchFamily="18" charset="0"/>
+              </a:rPr>
+              <a:t>При вызове внутри метода оператор </a:t>
+            </a:r>
+            <a:r>
+              <a:rPr lang="ru-RU" sz="2400" dirty="0" err="1" smtClean="0">
+                <a:latin typeface="Times New Roman" pitchFamily="18" charset="0"/>
+                <a:cs typeface="Times New Roman" pitchFamily="18" charset="0"/>
+              </a:rPr>
+              <a:t>return</a:t>
+            </a:r>
+            <a:r>
+              <a:rPr lang="ru-RU" sz="2400" dirty="0" smtClean="0">
+                <a:latin typeface="Times New Roman" pitchFamily="18" charset="0"/>
+                <a:cs typeface="Times New Roman" pitchFamily="18" charset="0"/>
+              </a:rPr>
+              <a:t> перерывает его выполнение и возвращает управление вызвавшему коду. Если сигнатура метода, в котором был вызван оператор </a:t>
+            </a:r>
+            <a:r>
+              <a:rPr lang="ru-RU" sz="2400" dirty="0" err="1" smtClean="0">
+                <a:latin typeface="Times New Roman" pitchFamily="18" charset="0"/>
+                <a:cs typeface="Times New Roman" pitchFamily="18" charset="0"/>
+              </a:rPr>
+              <a:t>return</a:t>
+            </a:r>
+            <a:r>
+              <a:rPr lang="ru-RU" sz="2400" dirty="0" smtClean="0">
+                <a:latin typeface="Times New Roman" pitchFamily="18" charset="0"/>
+                <a:cs typeface="Times New Roman" pitchFamily="18" charset="0"/>
+              </a:rPr>
+              <a:t>, предполагает возврат значения, то после </a:t>
+            </a:r>
+            <a:r>
+              <a:rPr lang="ru-RU" sz="2400" dirty="0" err="1" smtClean="0">
+                <a:latin typeface="Times New Roman" pitchFamily="18" charset="0"/>
+                <a:cs typeface="Times New Roman" pitchFamily="18" charset="0"/>
+              </a:rPr>
+              <a:t>return</a:t>
+            </a:r>
+            <a:r>
+              <a:rPr lang="ru-RU" sz="2400" dirty="0" smtClean="0">
+                <a:latin typeface="Times New Roman" pitchFamily="18" charset="0"/>
+                <a:cs typeface="Times New Roman" pitchFamily="18" charset="0"/>
+              </a:rPr>
+              <a:t> необходимо поставить значение или переменную соответствующего типа.</a:t>
+            </a:r>
+            <a:endParaRPr lang="ru-RU" sz="2400" dirty="0">
+              <a:latin typeface="Times New Roman" pitchFamily="18" charset="0"/>
+              <a:cs typeface="Times New Roman" pitchFamily="18" charset="0"/>
+            </a:endParaRPr>
+          </a:p>
+        </p:txBody>
+      </p:sp>
+      <p:pic>
+        <p:nvPicPr>
+          <p:cNvPr id="27650" name="Picture 2"/>
+          <p:cNvPicPr>
+            <a:picLocks noChangeAspect="1" noChangeArrowheads="1"/>
+          </p:cNvPicPr>
+          <p:nvPr/>
+        </p:nvPicPr>
+        <p:blipFill>
+          <a:blip r:embed="rId2"/>
+          <a:srcRect/>
+          <a:stretch>
+            <a:fillRect/>
+          </a:stretch>
+        </p:blipFill>
+        <p:spPr bwMode="auto">
+          <a:xfrm>
+            <a:off x="0" y="3311819"/>
+            <a:ext cx="4000496" cy="3546181"/>
+          </a:xfrm>
+          <a:prstGeom prst="rect">
+            <a:avLst/>
+          </a:prstGeom>
+          <a:noFill/>
+          <a:ln w="9525">
+            <a:noFill/>
+            <a:miter lim="800000"/>
+            <a:headEnd/>
+            <a:tailEnd/>
+          </a:ln>
+          <a:effectLst/>
+        </p:spPr>
+      </p:pic>
+      <p:pic>
+        <p:nvPicPr>
+          <p:cNvPr id="27651" name="Picture 3"/>
+          <p:cNvPicPr>
+            <a:picLocks noChangeAspect="1" noChangeArrowheads="1"/>
+          </p:cNvPicPr>
+          <p:nvPr/>
+        </p:nvPicPr>
+        <p:blipFill>
+          <a:blip r:embed="rId3"/>
+          <a:srcRect/>
+          <a:stretch>
+            <a:fillRect/>
+          </a:stretch>
+        </p:blipFill>
+        <p:spPr bwMode="auto">
+          <a:xfrm>
+            <a:off x="4286248" y="4026199"/>
+            <a:ext cx="4857752" cy="1857388"/>
+          </a:xfrm>
+          <a:prstGeom prst="rect">
+            <a:avLst/>
+          </a:prstGeom>
+          <a:noFill/>
+          <a:ln w="9525">
+            <a:noFill/>
+            <a:miter lim="800000"/>
+            <a:headEnd/>
+            <a:tailEnd/>
+          </a:ln>
+          <a:effectLst/>
+        </p:spPr>
+      </p:pic>
+      <p:sp>
+        <p:nvSpPr>
+          <p:cNvPr id="5" name="Прямоугольник 4"/>
+          <p:cNvSpPr/>
+          <p:nvPr/>
+        </p:nvSpPr>
+        <p:spPr>
+          <a:xfrm>
+            <a:off x="0" y="0"/>
+            <a:ext cx="9144000" cy="1015663"/>
+          </a:xfrm>
+          <a:prstGeom prst="rect">
+            <a:avLst/>
+          </a:prstGeom>
+        </p:spPr>
+        <p:txBody>
+          <a:bodyPr wrap="square">
+            <a:spAutoFit/>
+          </a:bodyPr>
+          <a:lstStyle/>
+          <a:p>
+            <a:pPr algn="ctr"/>
+            <a:r>
+              <a:rPr lang="ru-RU" sz="2400" b="1" dirty="0" smtClean="0">
+                <a:latin typeface="Times New Roman" pitchFamily="18" charset="0"/>
+                <a:cs typeface="Times New Roman" pitchFamily="18" charset="0"/>
+              </a:rPr>
+              <a:t>Более подробно про методы:</a:t>
+            </a:r>
+            <a:endParaRPr lang="en-US" sz="2400" b="1" dirty="0" smtClean="0">
+              <a:latin typeface="Times New Roman" pitchFamily="18" charset="0"/>
+              <a:cs typeface="Times New Roman" pitchFamily="18" charset="0"/>
+            </a:endParaRPr>
+          </a:p>
+          <a:p>
+            <a:pPr algn="ctr"/>
+            <a:r>
+              <a:rPr lang="en-US" b="1" dirty="0" smtClean="0">
+                <a:latin typeface="Times New Roman" pitchFamily="18" charset="0"/>
+                <a:cs typeface="Times New Roman" pitchFamily="18" charset="0"/>
+                <a:hlinkClick r:id="rId4"/>
+              </a:rPr>
+              <a:t>https://csharp.webdelphi.ru/metody-v-c/?ysclid=mltadf7lj3811591999</a:t>
+            </a:r>
+            <a:endParaRPr lang="en-US" b="1" dirty="0" smtClean="0">
+              <a:latin typeface="Times New Roman" pitchFamily="18" charset="0"/>
+              <a:cs typeface="Times New Roman" pitchFamily="18" charset="0"/>
+            </a:endParaRPr>
+          </a:p>
+          <a:p>
+            <a:pPr algn="ctr"/>
+            <a:r>
+              <a:rPr lang="en-US" b="1" dirty="0" smtClean="0">
+                <a:latin typeface="Times New Roman" pitchFamily="18" charset="0"/>
+                <a:cs typeface="Times New Roman" pitchFamily="18" charset="0"/>
+                <a:hlinkClick r:id="rId5"/>
+              </a:rPr>
+              <a:t>https://metanit.com/sharp/tutorial/2.34.php?ysclid=mltajfq52f115470918</a:t>
+            </a:r>
+            <a:endParaRPr lang="ru-RU" b="1" dirty="0" smtClean="0">
+              <a:latin typeface="Times New Roman" pitchFamily="18" charset="0"/>
+              <a:cs typeface="Times New Roman" pitchFamily="18" charset="0"/>
+            </a:endParaRPr>
+          </a:p>
+        </p:txBody>
+      </p:sp>
+    </p:spTree>
+  </p:cSld>
+  <p:clrMapOvr>
+    <a:masterClrMapping/>
+  </p:clrMapOvr>
+</p:sld>
+</file>
+
+<file path=ppt/slides/slide23.xml><?xml version="1.0" encoding="utf-8"?>
+<p:sld xmlns:a="http://schemas.openxmlformats.org/drawingml/2006/main" xmlns:r="http://schemas.openxmlformats.org/officeDocument/2006/relationships" xmlns:p="http://schemas.openxmlformats.org/presentationml/2006/main">
+  <p:cSld>
+    <p:spTree>
+      <p:nvGrpSpPr>
+        <p:cNvPr id="1" name=""/>
+        <p:cNvGrpSpPr/>
+        <p:nvPr/>
+      </p:nvGrpSpPr>
+      <p:grpSpPr>
+        <a:xfrm>
+          <a:off x="0" y="0"/>
+          <a:ext cx="0" cy="0"/>
+          <a:chOff x="0" y="0"/>
+          <a:chExt cx="0" cy="0"/>
+        </a:xfrm>
+      </p:grpSpPr>
+      <p:pic>
+        <p:nvPicPr>
+          <p:cNvPr id="29698" name="Picture 2"/>
+          <p:cNvPicPr>
+            <a:picLocks noChangeAspect="1" noChangeArrowheads="1"/>
+          </p:cNvPicPr>
+          <p:nvPr/>
+        </p:nvPicPr>
+        <p:blipFill>
+          <a:blip r:embed="rId2"/>
+          <a:srcRect/>
+          <a:stretch>
+            <a:fillRect/>
+          </a:stretch>
+        </p:blipFill>
+        <p:spPr bwMode="auto">
+          <a:xfrm>
+            <a:off x="0" y="642918"/>
+            <a:ext cx="8981594" cy="5643577"/>
+          </a:xfrm>
+          <a:prstGeom prst="rect">
+            <a:avLst/>
+          </a:prstGeom>
+          <a:noFill/>
+          <a:ln w="9525">
+            <a:noFill/>
+            <a:miter lim="800000"/>
+            <a:headEnd/>
+            <a:tailEnd/>
+          </a:ln>
+          <a:effectLst/>
+        </p:spPr>
+      </p:pic>
+    </p:spTree>
+  </p:cSld>
+  <p:clrMapOvr>
+    <a:masterClrMapping/>
+  </p:clrMapOvr>
+</p:sld>
+</file>
+
+<file path=ppt/slides/slide24.xml><?xml version="1.0" encoding="utf-8"?>
+<p:sld xmlns:a="http://schemas.openxmlformats.org/drawingml/2006/main" xmlns:r="http://schemas.openxmlformats.org/officeDocument/2006/relationships" xmlns:p="http://schemas.openxmlformats.org/presentationml/2006/main">
+  <p:cSld>
+    <p:spTree>
+      <p:nvGrpSpPr>
+        <p:cNvPr id="1" name=""/>
+        <p:cNvGrpSpPr/>
+        <p:nvPr/>
+      </p:nvGrpSpPr>
+      <p:grpSpPr>
+        <a:xfrm>
+          <a:off x="0" y="0"/>
+          <a:ext cx="0" cy="0"/>
+          <a:chOff x="0" y="0"/>
+          <a:chExt cx="0" cy="0"/>
+        </a:xfrm>
+      </p:grpSpPr>
+      <p:pic>
+        <p:nvPicPr>
+          <p:cNvPr id="1027" name="Picture 3"/>
+          <p:cNvPicPr>
+            <a:picLocks noChangeAspect="1" noChangeArrowheads="1"/>
+          </p:cNvPicPr>
+          <p:nvPr/>
+        </p:nvPicPr>
+        <p:blipFill>
+          <a:blip r:embed="rId2"/>
+          <a:srcRect/>
+          <a:stretch>
+            <a:fillRect/>
+          </a:stretch>
+        </p:blipFill>
+        <p:spPr bwMode="auto">
+          <a:xfrm>
+            <a:off x="0" y="5191642"/>
+            <a:ext cx="4143372" cy="1666357"/>
+          </a:xfrm>
+          <a:prstGeom prst="rect">
+            <a:avLst/>
+          </a:prstGeom>
+          <a:noFill/>
+          <a:ln w="9525">
+            <a:noFill/>
+            <a:miter lim="800000"/>
+            <a:headEnd/>
+            <a:tailEnd/>
+          </a:ln>
+          <a:effectLst/>
+        </p:spPr>
+      </p:pic>
+      <p:pic>
+        <p:nvPicPr>
+          <p:cNvPr id="1028" name="Picture 4"/>
+          <p:cNvPicPr>
+            <a:picLocks noChangeAspect="1" noChangeArrowheads="1"/>
+          </p:cNvPicPr>
+          <p:nvPr/>
+        </p:nvPicPr>
+        <p:blipFill>
+          <a:blip r:embed="rId3"/>
+          <a:srcRect/>
+          <a:stretch>
+            <a:fillRect/>
+          </a:stretch>
+        </p:blipFill>
+        <p:spPr bwMode="auto">
+          <a:xfrm>
+            <a:off x="5214942" y="5074592"/>
+            <a:ext cx="3214678" cy="1783408"/>
+          </a:xfrm>
+          <a:prstGeom prst="rect">
+            <a:avLst/>
+          </a:prstGeom>
+          <a:noFill/>
+          <a:ln w="9525">
+            <a:noFill/>
+            <a:miter lim="800000"/>
+            <a:headEnd/>
+            <a:tailEnd/>
+          </a:ln>
+          <a:effectLst/>
+        </p:spPr>
+      </p:pic>
+      <p:pic>
+        <p:nvPicPr>
+          <p:cNvPr id="5121" name="Picture 1"/>
+          <p:cNvPicPr>
+            <a:picLocks noChangeAspect="1" noChangeArrowheads="1"/>
+          </p:cNvPicPr>
+          <p:nvPr/>
+        </p:nvPicPr>
+        <p:blipFill>
+          <a:blip r:embed="rId4"/>
+          <a:srcRect/>
+          <a:stretch>
+            <a:fillRect/>
+          </a:stretch>
+        </p:blipFill>
+        <p:spPr bwMode="auto">
+          <a:xfrm>
+            <a:off x="285720" y="500042"/>
+            <a:ext cx="8296393" cy="4541407"/>
+          </a:xfrm>
+          <a:prstGeom prst="rect">
+            <a:avLst/>
+          </a:prstGeom>
+          <a:noFill/>
+          <a:ln w="9525">
+            <a:noFill/>
+            <a:miter lim="800000"/>
+            <a:headEnd/>
+            <a:tailEnd/>
+          </a:ln>
+          <a:effectLst/>
+        </p:spPr>
+      </p:pic>
+      <p:sp>
+        <p:nvSpPr>
+          <p:cNvPr id="7" name="Прямоугольник 6"/>
+          <p:cNvSpPr/>
+          <p:nvPr/>
+        </p:nvSpPr>
+        <p:spPr>
+          <a:xfrm>
+            <a:off x="0" y="0"/>
+            <a:ext cx="9144000" cy="369332"/>
+          </a:xfrm>
+          <a:prstGeom prst="rect">
+            <a:avLst/>
+          </a:prstGeom>
+        </p:spPr>
+        <p:txBody>
+          <a:bodyPr wrap="square">
+            <a:spAutoFit/>
+          </a:bodyPr>
+          <a:lstStyle/>
+          <a:p>
+            <a:pPr algn="ctr"/>
+            <a:r>
+              <a:rPr lang="en-US" b="1" dirty="0" smtClean="0">
+                <a:latin typeface="Times New Roman" pitchFamily="18" charset="0"/>
+                <a:cs typeface="Times New Roman" pitchFamily="18" charset="0"/>
+                <a:hlinkClick r:id="rId5"/>
+              </a:rPr>
+              <a:t>https://metanit.com/sharp/tutorial/20.5.php?ysclid=mltaxjsvxf405846068</a:t>
+            </a:r>
+            <a:endParaRPr lang="en-US" b="1" dirty="0" smtClean="0">
+              <a:latin typeface="Times New Roman" pitchFamily="18" charset="0"/>
+              <a:cs typeface="Times New Roman" pitchFamily="18" charset="0"/>
+            </a:endParaRPr>
+          </a:p>
+        </p:txBody>
+      </p:sp>
+    </p:spTree>
+  </p:cSld>
+  <p:clrMapOvr>
+    <a:masterClrMapping/>
+  </p:clrMapOvr>
+</p:sld>
+</file>
+
+<file path=ppt/slides/slide25.xml><?xml version="1.0" encoding="utf-8"?>
+<p:sld xmlns:a="http://schemas.openxmlformats.org/drawingml/2006/main" xmlns:r="http://schemas.openxmlformats.org/officeDocument/2006/relationships" xmlns:p="http://schemas.openxmlformats.org/presentationml/2006/main">
+  <p:cSld>
+    <p:spTree>
+      <p:nvGrpSpPr>
+        <p:cNvPr id="1" name=""/>
+        <p:cNvGrpSpPr/>
+        <p:nvPr/>
+      </p:nvGrpSpPr>
+      <p:grpSpPr>
+        <a:xfrm>
+          <a:off x="0" y="0"/>
+          <a:ext cx="0" cy="0"/>
+          <a:chOff x="0" y="0"/>
+          <a:chExt cx="0" cy="0"/>
+        </a:xfrm>
+      </p:grpSpPr>
+      <p:pic>
+        <p:nvPicPr>
+          <p:cNvPr id="28674" name="Picture 2"/>
+          <p:cNvPicPr>
+            <a:picLocks noChangeAspect="1" noChangeArrowheads="1"/>
+          </p:cNvPicPr>
+          <p:nvPr/>
+        </p:nvPicPr>
+        <p:blipFill>
+          <a:blip r:embed="rId2"/>
+          <a:srcRect/>
+          <a:stretch>
+            <a:fillRect/>
+          </a:stretch>
+        </p:blipFill>
+        <p:spPr bwMode="auto">
+          <a:xfrm>
+            <a:off x="0" y="428604"/>
+            <a:ext cx="9144000" cy="5749614"/>
+          </a:xfrm>
+          <a:prstGeom prst="rect">
+            <a:avLst/>
+          </a:prstGeom>
+          <a:noFill/>
+          <a:ln w="9525">
+            <a:noFill/>
+            <a:miter lim="800000"/>
+            <a:headEnd/>
+            <a:tailEnd/>
+          </a:ln>
+          <a:effectLst/>
+        </p:spPr>
+      </p:pic>
+    </p:spTree>
+  </p:cSld>
+  <p:clrMapOvr>
+    <a:masterClrMapping/>
+  </p:clrMapOvr>
+</p:sld>
+</file>
+
+<file path=ppt/slides/slide26.xml><?xml version="1.0" encoding="utf-8"?>
+<p:sld xmlns:a="http://schemas.openxmlformats.org/drawingml/2006/main" xmlns:r="http://schemas.openxmlformats.org/officeDocument/2006/relationships" xmlns:p="http://schemas.openxmlformats.org/presentationml/2006/main">
+  <p:cSld>
+    <p:spTree>
+      <p:nvGrpSpPr>
+        <p:cNvPr id="1" name=""/>
+        <p:cNvGrpSpPr/>
+        <p:nvPr/>
+      </p:nvGrpSpPr>
+      <p:grpSpPr>
+        <a:xfrm>
+          <a:off x="0" y="0"/>
+          <a:ext cx="0" cy="0"/>
+          <a:chOff x="0" y="0"/>
+          <a:chExt cx="0" cy="0"/>
+        </a:xfrm>
+      </p:grpSpPr>
+      <p:sp>
+        <p:nvSpPr>
+          <p:cNvPr id="11" name="Прямоугольник 10"/>
+          <p:cNvSpPr/>
+          <p:nvPr/>
+        </p:nvSpPr>
+        <p:spPr>
+          <a:xfrm>
+            <a:off x="0" y="3500438"/>
+            <a:ext cx="9144000" cy="3357562"/>
+          </a:xfrm>
+          <a:prstGeom prst="rect">
+            <a:avLst/>
+          </a:prstGeom>
+          <a:solidFill>
+            <a:schemeClr val="accent3">
+              <a:lumMod val="20000"/>
+              <a:lumOff val="80000"/>
+            </a:schemeClr>
+          </a:solidFill>
+          <a:ln>
+            <a:noFill/>
+          </a:ln>
+        </p:spPr>
+        <p:style>
+          <a:lnRef idx="2">
+            <a:schemeClr val="accent1">
+              <a:shade val="50000"/>
+            </a:schemeClr>
+          </a:lnRef>
+          <a:fillRef idx="1">
+            <a:schemeClr val="accent1"/>
+          </a:fillRef>
+          <a:effectRef idx="0">
+            <a:schemeClr val="accent1"/>
+          </a:effectRef>
+          <a:fontRef idx="minor">
+            <a:schemeClr val="lt1"/>
+          </a:fontRef>
+        </p:style>
+        <p:txBody>
+          <a:bodyPr rtlCol="0" anchor="ctr"/>
+          <a:lstStyle/>
+          <a:p>
+            <a:pPr algn="ctr"/>
+            <a:endParaRPr lang="ru-RU"/>
+          </a:p>
+        </p:txBody>
+      </p:sp>
+      <p:pic>
+        <p:nvPicPr>
+          <p:cNvPr id="2051" name="Picture 3"/>
+          <p:cNvPicPr>
+            <a:picLocks noChangeAspect="1" noChangeArrowheads="1"/>
+          </p:cNvPicPr>
+          <p:nvPr/>
+        </p:nvPicPr>
+        <p:blipFill>
+          <a:blip r:embed="rId2"/>
+          <a:srcRect/>
+          <a:stretch>
+            <a:fillRect/>
+          </a:stretch>
+        </p:blipFill>
+        <p:spPr bwMode="auto">
+          <a:xfrm>
+            <a:off x="714348" y="1071546"/>
+            <a:ext cx="804866" cy="2390881"/>
+          </a:xfrm>
+          <a:prstGeom prst="rect">
+            <a:avLst/>
+          </a:prstGeom>
+          <a:noFill/>
+          <a:ln w="9525">
+            <a:noFill/>
+            <a:miter lim="800000"/>
+            <a:headEnd/>
+            <a:tailEnd/>
+          </a:ln>
+          <a:effectLst/>
+        </p:spPr>
+      </p:pic>
+      <p:sp>
+        <p:nvSpPr>
+          <p:cNvPr id="4" name="Прямоугольник 3"/>
+          <p:cNvSpPr/>
+          <p:nvPr/>
+        </p:nvSpPr>
+        <p:spPr>
+          <a:xfrm>
+            <a:off x="0" y="500042"/>
+            <a:ext cx="2428860" cy="646331"/>
+          </a:xfrm>
+          <a:prstGeom prst="rect">
+            <a:avLst/>
+          </a:prstGeom>
+        </p:spPr>
+        <p:txBody>
+          <a:bodyPr wrap="square">
+            <a:spAutoFit/>
+          </a:bodyPr>
+          <a:lstStyle/>
+          <a:p>
+            <a:pPr algn="just"/>
+            <a:r>
+              <a:rPr lang="ru-RU" dirty="0" smtClean="0">
+                <a:latin typeface="Times New Roman" pitchFamily="18" charset="0"/>
+                <a:cs typeface="Times New Roman" pitchFamily="18" charset="0"/>
+              </a:rPr>
+              <a:t>Выберите допустимые названия переменных</a:t>
+            </a:r>
+            <a:endParaRPr lang="ru-RU" dirty="0"/>
+          </a:p>
+        </p:txBody>
+      </p:sp>
+      <p:pic>
+        <p:nvPicPr>
+          <p:cNvPr id="5" name="Рисунок 4"/>
+          <p:cNvPicPr/>
+          <p:nvPr/>
+        </p:nvPicPr>
+        <p:blipFill>
+          <a:blip r:embed="rId3"/>
+          <a:srcRect/>
+          <a:stretch>
+            <a:fillRect/>
+          </a:stretch>
+        </p:blipFill>
+        <p:spPr bwMode="auto">
+          <a:xfrm>
+            <a:off x="2714612" y="714357"/>
+            <a:ext cx="2857519" cy="2357454"/>
+          </a:xfrm>
+          <a:prstGeom prst="rect">
+            <a:avLst/>
+          </a:prstGeom>
+          <a:noFill/>
+          <a:ln w="9525">
+            <a:noFill/>
+            <a:miter lim="800000"/>
+            <a:headEnd/>
+            <a:tailEnd/>
+          </a:ln>
+        </p:spPr>
+      </p:pic>
+      <p:sp>
+        <p:nvSpPr>
+          <p:cNvPr id="6" name="Прямоугольник 5"/>
+          <p:cNvSpPr/>
+          <p:nvPr/>
+        </p:nvSpPr>
+        <p:spPr>
+          <a:xfrm>
+            <a:off x="4214810" y="357166"/>
+            <a:ext cx="2928958" cy="461665"/>
+          </a:xfrm>
+          <a:prstGeom prst="rect">
+            <a:avLst/>
+          </a:prstGeom>
+        </p:spPr>
+        <p:txBody>
+          <a:bodyPr wrap="square">
+            <a:spAutoFit/>
+          </a:bodyPr>
+          <a:lstStyle/>
+          <a:p>
+            <a:pPr algn="just"/>
+            <a:r>
+              <a:rPr lang="ru-RU" sz="2400" b="1" dirty="0" smtClean="0">
+                <a:latin typeface="Times New Roman" pitchFamily="18" charset="0"/>
+                <a:cs typeface="Times New Roman" pitchFamily="18" charset="0"/>
+              </a:rPr>
+              <a:t>Что вернут коды?</a:t>
+            </a:r>
+            <a:endParaRPr lang="ru-RU" sz="2400" b="1" dirty="0"/>
+          </a:p>
+        </p:txBody>
+      </p:sp>
+      <p:pic>
+        <p:nvPicPr>
+          <p:cNvPr id="7" name="Рисунок 6"/>
+          <p:cNvPicPr/>
+          <p:nvPr/>
+        </p:nvPicPr>
+        <p:blipFill>
+          <a:blip r:embed="rId4"/>
+          <a:srcRect/>
+          <a:stretch>
+            <a:fillRect/>
+          </a:stretch>
+        </p:blipFill>
+        <p:spPr bwMode="auto">
+          <a:xfrm>
+            <a:off x="5929322" y="714357"/>
+            <a:ext cx="3214678" cy="2214578"/>
+          </a:xfrm>
+          <a:prstGeom prst="rect">
+            <a:avLst/>
+          </a:prstGeom>
+          <a:noFill/>
+          <a:ln w="9525">
+            <a:noFill/>
+            <a:miter lim="800000"/>
+            <a:headEnd/>
+            <a:tailEnd/>
+          </a:ln>
+        </p:spPr>
+      </p:pic>
+      <p:sp>
+        <p:nvSpPr>
+          <p:cNvPr id="8" name="Прямоугольник 7"/>
+          <p:cNvSpPr/>
+          <p:nvPr/>
+        </p:nvSpPr>
+        <p:spPr>
+          <a:xfrm>
+            <a:off x="0" y="3571876"/>
+            <a:ext cx="3143240" cy="2585323"/>
+          </a:xfrm>
+          <a:prstGeom prst="rect">
+            <a:avLst/>
+          </a:prstGeom>
+        </p:spPr>
+        <p:txBody>
+          <a:bodyPr wrap="square">
+            <a:spAutoFit/>
+          </a:bodyPr>
+          <a:lstStyle/>
+          <a:p>
+            <a:pPr algn="just"/>
+            <a:r>
+              <a:rPr lang="ru-RU" dirty="0" smtClean="0">
+                <a:latin typeface="Times New Roman" pitchFamily="18" charset="0"/>
+                <a:cs typeface="Times New Roman" pitchFamily="18" charset="0"/>
+              </a:rPr>
+              <a:t>На вход построчно подается неизвестное количество строк в формате: число, знак операции, число, знак операции и т.д.</a:t>
+            </a:r>
+            <a:endParaRPr lang="en-US" dirty="0" smtClean="0">
+              <a:latin typeface="Times New Roman" pitchFamily="18" charset="0"/>
+              <a:cs typeface="Times New Roman" pitchFamily="18" charset="0"/>
+            </a:endParaRPr>
+          </a:p>
+          <a:p>
+            <a:pPr algn="just"/>
+            <a:r>
+              <a:rPr lang="ru-RU" dirty="0" smtClean="0">
+                <a:latin typeface="Times New Roman" pitchFamily="18" charset="0"/>
+                <a:cs typeface="Times New Roman" pitchFamily="18" charset="0"/>
+              </a:rPr>
+              <a:t>Выведите полученный результат, если он стал отрицательным, и прекратите выполнение программы.</a:t>
+            </a:r>
+            <a:endParaRPr lang="ru-RU" dirty="0">
+              <a:latin typeface="Times New Roman" pitchFamily="18" charset="0"/>
+              <a:cs typeface="Times New Roman" pitchFamily="18" charset="0"/>
+            </a:endParaRPr>
+          </a:p>
+        </p:txBody>
+      </p:sp>
+      <p:pic>
+        <p:nvPicPr>
+          <p:cNvPr id="2052" name="Picture 4"/>
+          <p:cNvPicPr>
+            <a:picLocks noChangeAspect="1" noChangeArrowheads="1"/>
+          </p:cNvPicPr>
+          <p:nvPr/>
+        </p:nvPicPr>
+        <p:blipFill>
+          <a:blip r:embed="rId5"/>
+          <a:srcRect/>
+          <a:stretch>
+            <a:fillRect/>
+          </a:stretch>
+        </p:blipFill>
+        <p:spPr bwMode="auto">
+          <a:xfrm>
+            <a:off x="3286116" y="3500438"/>
+            <a:ext cx="2571768" cy="3357562"/>
+          </a:xfrm>
+          <a:prstGeom prst="rect">
+            <a:avLst/>
+          </a:prstGeom>
+          <a:noFill/>
+          <a:ln w="9525">
+            <a:noFill/>
+            <a:miter lim="800000"/>
+            <a:headEnd/>
+            <a:tailEnd/>
+          </a:ln>
+          <a:effectLst/>
+        </p:spPr>
+      </p:pic>
+      <p:pic>
+        <p:nvPicPr>
+          <p:cNvPr id="2053" name="Picture 5"/>
+          <p:cNvPicPr>
+            <a:picLocks noChangeAspect="1" noChangeArrowheads="1"/>
+          </p:cNvPicPr>
+          <p:nvPr/>
+        </p:nvPicPr>
+        <p:blipFill>
+          <a:blip r:embed="rId6"/>
+          <a:srcRect/>
+          <a:stretch>
+            <a:fillRect/>
+          </a:stretch>
+        </p:blipFill>
+        <p:spPr bwMode="auto">
+          <a:xfrm>
+            <a:off x="6000760" y="3533775"/>
+            <a:ext cx="2924175" cy="3324225"/>
+          </a:xfrm>
+          <a:prstGeom prst="rect">
+            <a:avLst/>
+          </a:prstGeom>
+          <a:noFill/>
+          <a:ln w="9525">
+            <a:noFill/>
+            <a:miter lim="800000"/>
+            <a:headEnd/>
+            <a:tailEnd/>
+          </a:ln>
+          <a:effectLst/>
+        </p:spPr>
+      </p:pic>
+      <p:sp>
+        <p:nvSpPr>
+          <p:cNvPr id="12" name="Прямоугольник 11"/>
+          <p:cNvSpPr/>
+          <p:nvPr/>
+        </p:nvSpPr>
+        <p:spPr>
+          <a:xfrm>
+            <a:off x="0" y="6072206"/>
+            <a:ext cx="3214678" cy="646331"/>
+          </a:xfrm>
+          <a:prstGeom prst="rect">
+            <a:avLst/>
+          </a:prstGeom>
+        </p:spPr>
+        <p:txBody>
+          <a:bodyPr wrap="square">
+            <a:spAutoFit/>
+          </a:bodyPr>
+          <a:lstStyle/>
+          <a:p>
+            <a:pPr algn="ctr"/>
+            <a:r>
+              <a:rPr lang="en-US" b="1" dirty="0" smtClean="0">
+                <a:latin typeface="Times New Roman" pitchFamily="18" charset="0"/>
+                <a:cs typeface="Times New Roman" pitchFamily="18" charset="0"/>
+                <a:hlinkClick r:id="rId7"/>
+              </a:rPr>
+              <a:t>https://stepik.org/lesson/588411/step/6?unit=583364</a:t>
+            </a:r>
+            <a:endParaRPr lang="en-US" b="1" dirty="0" smtClean="0">
+              <a:latin typeface="Times New Roman" pitchFamily="18" charset="0"/>
+              <a:cs typeface="Times New Roman" pitchFamily="18" charset="0"/>
+            </a:endParaRPr>
+          </a:p>
+        </p:txBody>
+      </p:sp>
+      <p:sp>
+        <p:nvSpPr>
+          <p:cNvPr id="13" name="Прямоугольник 12"/>
+          <p:cNvSpPr/>
+          <p:nvPr/>
+        </p:nvSpPr>
+        <p:spPr>
+          <a:xfrm>
+            <a:off x="0" y="0"/>
+            <a:ext cx="9144000" cy="369332"/>
+          </a:xfrm>
+          <a:prstGeom prst="rect">
+            <a:avLst/>
+          </a:prstGeom>
+        </p:spPr>
+        <p:txBody>
+          <a:bodyPr wrap="square">
+            <a:spAutoFit/>
+          </a:bodyPr>
+          <a:lstStyle/>
+          <a:p>
+            <a:pPr algn="ctr"/>
+            <a:r>
+              <a:rPr lang="ru-RU" b="1" dirty="0" smtClean="0">
+                <a:latin typeface="Times New Roman" pitchFamily="18" charset="0"/>
+                <a:cs typeface="Times New Roman" pitchFamily="18" charset="0"/>
+              </a:rPr>
+              <a:t>Онлайн С</a:t>
+            </a:r>
+            <a:r>
+              <a:rPr lang="en-US" b="1" dirty="0" smtClean="0">
+                <a:latin typeface="Times New Roman" pitchFamily="18" charset="0"/>
+                <a:cs typeface="Times New Roman" pitchFamily="18" charset="0"/>
+              </a:rPr>
+              <a:t>#:</a:t>
+            </a:r>
+            <a:r>
+              <a:rPr lang="en-US" b="1" dirty="0" smtClean="0">
+                <a:latin typeface="Times New Roman" pitchFamily="18" charset="0"/>
+                <a:cs typeface="Times New Roman" pitchFamily="18" charset="0"/>
+                <a:hlinkClick r:id="rId8"/>
+              </a:rPr>
+              <a:t> https://www.online-compiler.com/en/compiler/csharp</a:t>
+            </a:r>
+            <a:endParaRPr lang="en-US" b="1" dirty="0" smtClean="0">
+              <a:latin typeface="Times New Roman" pitchFamily="18" charset="0"/>
+              <a:cs typeface="Times New Roman" pitchFamily="18" charset="0"/>
+            </a:endParaRPr>
+          </a:p>
+        </p:txBody>
+      </p:sp>
+    </p:spTree>
+  </p:cSld>
+  <p:clrMapOvr>
+    <a:masterClrMapping/>
+  </p:clrMapOvr>
+</p:sld>
+</file>
+
 <file path=ppt/slides/slide3.xml><?xml version="1.0" encoding="utf-8"?>
 <p:sld xmlns:a="http://schemas.openxmlformats.org/drawingml/2006/main" xmlns:r="http://schemas.openxmlformats.org/officeDocument/2006/relationships" xmlns:p="http://schemas.openxmlformats.org/presentationml/2006/main">
   <p:cSld>
@@ -4470,14 +8645,7 @@
                 <a:latin typeface="Courier New" pitchFamily="49" charset="0"/>
                 <a:cs typeface="Courier New" pitchFamily="49" charset="0"/>
               </a:rPr>
-              <a:t>class </a:t>
-            </a:r>
-            <a:r>
-              <a:rPr lang="en-US" sz="2000" dirty="0" smtClean="0">
-                <a:latin typeface="Courier New" pitchFamily="49" charset="0"/>
-                <a:cs typeface="Courier New" pitchFamily="49" charset="0"/>
-              </a:rPr>
-              <a:t>Program</a:t>
+              <a:t>class Program</a:t>
             </a:r>
             <a:br>
               <a:rPr lang="en-US" sz="2000" dirty="0" smtClean="0">
@@ -4844,14 +9012,7 @@
                 <a:latin typeface="Times New Roman" pitchFamily="18" charset="0"/>
                 <a:cs typeface="Times New Roman" pitchFamily="18" charset="0"/>
               </a:rPr>
-              <a:t>строку</a:t>
-            </a:r>
-            <a:r>
-              <a:rPr lang="ru-RU" dirty="0" smtClean="0">
-                <a:latin typeface="Times New Roman" pitchFamily="18" charset="0"/>
-                <a:cs typeface="Times New Roman" pitchFamily="18" charset="0"/>
-              </a:rPr>
-              <a:t> </a:t>
+              <a:t>строку </a:t>
             </a:r>
             <a:r>
               <a:rPr lang="en-US" dirty="0" smtClean="0">
@@ -4872,14 +9033,7 @@
                 <a:latin typeface="Times New Roman" pitchFamily="18" charset="0"/>
                 <a:cs typeface="Times New Roman" pitchFamily="18" charset="0"/>
               </a:rPr>
-              <a:t>&gt;Exe</a:t>
-            </a:r>
-            <a:r>
-              <a:rPr lang="en-US" dirty="0" smtClean="0">
-                <a:latin typeface="Times New Roman" pitchFamily="18" charset="0"/>
-                <a:cs typeface="Times New Roman" pitchFamily="18" charset="0"/>
-              </a:rPr>
-              <a:t>&lt;/</a:t>
+              <a:t>&gt;Exe&lt;/</a:t>
             </a:r>
             <a:r>
               <a:rPr lang="en-US" dirty="0" err="1" smtClean="0">
